--- a/Signal-Nine-功能报告.pptx
+++ b/Signal-Nine-功能报告.pptx
@@ -4,6 +4,9 @@
   <p:sldMasterIdLst>
     <p:sldMasterId id="2147483648" r:id="rId1"/>
   </p:sldMasterIdLst>
+  <p:notesMasterIdLst>
+    <p:notesMasterId r:id="rId13"/>
+  </p:notesMasterIdLst>
   <p:sldIdLst>
     <p:sldId id="256" r:id="rId2"/>
     <p:sldId id="257" r:id="rId3"/>
@@ -12,13 +15,12 @@
     <p:sldId id="260" r:id="rId6"/>
     <p:sldId id="261" r:id="rId7"/>
     <p:sldId id="262" r:id="rId8"/>
-    <p:sldId id="263" r:id="rId9"/>
-    <p:sldId id="264" r:id="rId10"/>
+    <p:sldId id="265" r:id="rId9"/>
+    <p:sldId id="263" r:id="rId10"/>
+    <p:sldId id="266" r:id="rId11"/>
+    <p:sldId id="267" r:id="rId12"/>
   </p:sldIdLst>
-  <p:notesMasterIdLst>
-    <p:notesMasterId r:id="rId11"/>
-  </p:notesMasterIdLst>
-  <p:sldSz cx="9144000" cy="5143500"/>
+  <p:sldSz cx="9144000" cy="5143500" type="screen16x9"/>
   <p:notesSz cx="5143500" cy="9144000"/>
   <p:defaultTextStyle>
     <a:lvl1pPr marL="0" algn="l" defTabSz="914400" rtl="0" eaLnBrk="1" latinLnBrk="0" hangingPunct="1">
@@ -112,6 +114,11 @@
       </a:defRPr>
     </a:lvl9pPr>
   </p:defaultTextStyle>
+  <p:extLst>
+    <p:ext uri="{EFAFB233-063F-42B5-8137-9DF3F51BA10A}">
+      <p15:sldGuideLst xmlns:p15="http://schemas.microsoft.com/office/powerpoint/2012/main"/>
+    </p:ext>
+  </p:extLst>
 </p:presentation>
 </file>
 
@@ -137,234 +144,10 @@
           <a:chExt cx="0" cy="0"/>
         </a:xfrm>
       </p:grpSpPr>
-      <p:sp>
-        <p:nvSpPr>
-          <p:cNvPr id="2" name="Header Placeholder 1"/>
-          <p:cNvSpPr>
-            <a:spLocks noGrp="1"/>
-          </p:cNvSpPr>
-          <p:nvPr>
-            <p:ph type="hdr" sz="quarter"/>
-          </p:nvPr>
-        </p:nvSpPr>
-        <p:spPr>
-          <a:xfrm>
-            <a:off x="0" y="0"/>
-            <a:ext cx="2971800" cy="458788"/>
-          </a:xfrm>
-          <a:prstGeom prst="rect">
-            <a:avLst/>
-          </a:prstGeom>
-        </p:spPr>
-        <p:txBody>
-          <a:bodyPr vert="horz" lIns="91440" tIns="45720" rIns="91440" bIns="45720" rtlCol="0"/>
-          <a:lstStyle>
-            <a:lvl1pPr algn="l">
-              <a:defRPr sz="1200"/>
-            </a:lvl1pPr>
-          </a:lstStyle>
-          <a:p>
-            <a:endParaRPr lang="en-US"/>
-          </a:p>
-        </p:txBody>
-      </p:sp>
-      <p:sp>
-        <p:nvSpPr>
-          <p:cNvPr id="3" name="Date Placeholder 2"/>
-          <p:cNvSpPr>
-            <a:spLocks noGrp="1"/>
-          </p:cNvSpPr>
-          <p:nvPr>
-            <p:ph type="dt" idx="1"/>
-          </p:nvPr>
-        </p:nvSpPr>
-        <p:spPr>
-          <a:xfrm>
-            <a:off x="3884613" y="0"/>
-            <a:ext cx="2971800" cy="458788"/>
-          </a:xfrm>
-          <a:prstGeom prst="rect">
-            <a:avLst/>
-          </a:prstGeom>
-        </p:spPr>
-        <p:txBody>
-          <a:bodyPr vert="horz" lIns="91440" tIns="45720" rIns="91440" bIns="45720" rtlCol="0"/>
-          <a:lstStyle>
-            <a:lvl1pPr algn="r">
-              <a:defRPr sz="1200"/>
-            </a:lvl1pPr>
-          </a:lstStyle>
-          <a:p>
-            <a:fld id="{5282F153-3F37-0F45-9E97-73ACFA13230C}" type="datetimeFigureOut">
-              <a:rPr lang="en-US"/>
-              <a:t>7/23/19</a:t>
-            </a:fld>
-            <a:endParaRPr lang="en-US"/>
-          </a:p>
-        </p:txBody>
-      </p:sp>
-      <p:sp>
-        <p:nvSpPr>
-          <p:cNvPr id="4" name="Slide Image Placeholder 3"/>
-          <p:cNvSpPr>
-            <a:spLocks noGrp="1" noRot="1" noChangeAspect="1"/>
-          </p:cNvSpPr>
-          <p:nvPr>
-            <p:ph type="sldImg" idx="2"/>
-          </p:nvPr>
-        </p:nvSpPr>
-        <p:spPr>
-          <a:xfrm>
-            <a:off x="685800" y="1143000"/>
-            <a:ext cx="5486400" cy="3086100"/>
-          </a:xfrm>
-          <a:prstGeom prst="rect">
-            <a:avLst/>
-          </a:prstGeom>
-          <a:noFill/>
-          <a:ln w="12700">
-            <a:solidFill>
-              <a:prstClr val="black"/>
-            </a:solidFill>
-          </a:ln>
-        </p:spPr>
-        <p:txBody>
-          <a:bodyPr vert="horz" lIns="91440" tIns="45720" rIns="91440" bIns="45720" rtlCol="0" anchor="ctr"/>
-          <a:lstStyle/>
-          <a:p>
-            <a:endParaRPr lang="en-US"/>
-          </a:p>
-        </p:txBody>
-      </p:sp>
-      <p:sp>
-        <p:nvSpPr>
-          <p:cNvPr id="5" name="Notes Placeholder 4"/>
-          <p:cNvSpPr>
-            <a:spLocks noGrp="1"/>
-          </p:cNvSpPr>
-          <p:nvPr>
-            <p:ph type="body" sz="quarter" idx="3"/>
-          </p:nvPr>
-        </p:nvSpPr>
-        <p:spPr>
-          <a:xfrm>
-            <a:off x="685800" y="4400550"/>
-            <a:ext cx="5486400" cy="3600450"/>
-          </a:xfrm>
-          <a:prstGeom prst="rect">
-            <a:avLst/>
-          </a:prstGeom>
-        </p:spPr>
-        <p:txBody>
-          <a:bodyPr vert="horz" lIns="91440" tIns="45720" rIns="91440" bIns="45720" rtlCol="0"/>
-          <a:lstStyle/>
-          <a:p>
-            <a:pPr lvl="0"/>
-            <a:r>
-              <a:rPr lang="en-US"/>
-              <a:t>Click to edit Master text styles</a:t>
-            </a:r>
-          </a:p>
-          <a:p>
-            <a:pPr lvl="1"/>
-            <a:r>
-              <a:rPr lang="en-US"/>
-              <a:t>Second level</a:t>
-            </a:r>
-          </a:p>
-          <a:p>
-            <a:pPr lvl="2"/>
-            <a:r>
-              <a:rPr lang="en-US"/>
-              <a:t>Third level</a:t>
-            </a:r>
-          </a:p>
-          <a:p>
-            <a:pPr lvl="3"/>
-            <a:r>
-              <a:rPr lang="en-US"/>
-              <a:t>Fourth level</a:t>
-            </a:r>
-          </a:p>
-          <a:p>
-            <a:pPr lvl="4"/>
-            <a:r>
-              <a:rPr lang="en-US"/>
-              <a:t>Fifth level</a:t>
-            </a:r>
-          </a:p>
-        </p:txBody>
-      </p:sp>
-      <p:sp>
-        <p:nvSpPr>
-          <p:cNvPr id="6" name="Footer Placeholder 5"/>
-          <p:cNvSpPr>
-            <a:spLocks noGrp="1"/>
-          </p:cNvSpPr>
-          <p:nvPr>
-            <p:ph type="ftr" sz="quarter" idx="4"/>
-          </p:nvPr>
-        </p:nvSpPr>
-        <p:spPr>
-          <a:xfrm>
-            <a:off x="0" y="8685213"/>
-            <a:ext cx="2971800" cy="458787"/>
-          </a:xfrm>
-          <a:prstGeom prst="rect">
-            <a:avLst/>
-          </a:prstGeom>
-        </p:spPr>
-        <p:txBody>
-          <a:bodyPr vert="horz" lIns="91440" tIns="45720" rIns="91440" bIns="45720" rtlCol="0" anchor="b"/>
-          <a:lstStyle>
-            <a:lvl1pPr algn="l">
-              <a:defRPr sz="1200"/>
-            </a:lvl1pPr>
-          </a:lstStyle>
-          <a:p>
-            <a:endParaRPr lang="en-US"/>
-          </a:p>
-        </p:txBody>
-      </p:sp>
-      <p:sp>
-        <p:nvSpPr>
-          <p:cNvPr id="7" name="Slide Number Placeholder 6"/>
-          <p:cNvSpPr>
-            <a:spLocks noGrp="1"/>
-          </p:cNvSpPr>
-          <p:nvPr>
-            <p:ph type="sldNum" sz="quarter" idx="5"/>
-          </p:nvPr>
-        </p:nvSpPr>
-        <p:spPr>
-          <a:xfrm>
-            <a:off x="3884613" y="8685213"/>
-            <a:ext cx="2971800" cy="458787"/>
-          </a:xfrm>
-          <a:prstGeom prst="rect">
-            <a:avLst/>
-          </a:prstGeom>
-        </p:spPr>
-        <p:txBody>
-          <a:bodyPr vert="horz" lIns="91440" tIns="45720" rIns="91440" bIns="45720" rtlCol="0" anchor="b"/>
-          <a:lstStyle>
-            <a:lvl1pPr algn="r">
-              <a:defRPr sz="1200"/>
-            </a:lvl1pPr>
-          </a:lstStyle>
-          <a:p>
-            <a:fld id="{CE5E9CC1-C706-0F49-92D6-E571CC5EEA8F}" type="slidenum">
-              <a:rPr lang="en-US"/>
-              <a:t>‹#›</a:t>
-            </a:fld>
-            <a:endParaRPr lang="en-US"/>
-          </a:p>
-        </p:txBody>
-      </p:sp>
     </p:spTree>
     <p:extLst>
       <p:ext uri="{BB962C8B-B14F-4D97-AF65-F5344CB8AC3E}">
-        <p14:creationId xmlns:p14="http://schemas.microsoft.com/office/powerpoint/2010/main" val="1024086991"/>
+        <p14:creationId xmlns:p14="http://schemas.microsoft.com/office/powerpoint/2010/main" val="2439530734"/>
       </p:ext>
     </p:extLst>
   </p:cSld>
@@ -508,10 +291,6 @@
           <a:bodyPr/>
           <a:lstStyle/>
           <a:p>
-            <a:r>
-              <a:rPr lang="en-US" dirty="0"/>
-              <a:t/>
-            </a:r>
             <a:endParaRPr lang="en-US" dirty="0"/>
           </a:p>
         </p:txBody>
@@ -534,6 +313,174 @@
             <a:fld id="{F7021451-1387-4CA6-816F-3879F97B5CBC}" type="slidenum">
               <a:rPr lang="en-US"/>
               <a:t>1</a:t>
+            </a:fld>
+            <a:endParaRPr lang="en-US"/>
+          </a:p>
+        </p:txBody>
+      </p:sp>
+    </p:spTree>
+    <p:extLst>
+      <p:ext uri="{BB962C8B-B14F-4D97-AF65-F5344CB8AC3E}">
+        <p14:creationId xmlns:p14="http://schemas.microsoft.com/office/powerpoint/2010/main" val="1024086991"/>
+      </p:ext>
+    </p:extLst>
+  </p:cSld>
+  <p:clrMapOvr>
+    <a:masterClrMapping/>
+  </p:clrMapOvr>
+</p:notes>
+</file>
+
+<file path=ppt/notesSlides/notesSlide10.xml><?xml version="1.0" encoding="utf-8"?>
+<p:notes xmlns:a="http://schemas.openxmlformats.org/drawingml/2006/main" xmlns:r="http://schemas.openxmlformats.org/officeDocument/2006/relationships" xmlns:p="http://schemas.openxmlformats.org/presentationml/2006/main">
+  <p:cSld>
+    <p:spTree>
+      <p:nvGrpSpPr>
+        <p:cNvPr id="1" name=""/>
+        <p:cNvGrpSpPr/>
+        <p:nvPr/>
+      </p:nvGrpSpPr>
+      <p:grpSpPr>
+        <a:xfrm>
+          <a:off x="0" y="0"/>
+          <a:ext cx="0" cy="0"/>
+          <a:chOff x="0" y="0"/>
+          <a:chExt cx="0" cy="0"/>
+        </a:xfrm>
+      </p:grpSpPr>
+      <p:sp>
+        <p:nvSpPr>
+          <p:cNvPr id="2" name="Slide Image Placeholder 1"/>
+          <p:cNvSpPr>
+            <a:spLocks noGrp="1" noRot="1" noChangeAspect="1"/>
+          </p:cNvSpPr>
+          <p:nvPr>
+            <p:ph type="sldImg"/>
+          </p:nvPr>
+        </p:nvSpPr>
+        <p:spPr/>
+      </p:sp>
+      <p:sp>
+        <p:nvSpPr>
+          <p:cNvPr id="3" name="Notes Placeholder 2"/>
+          <p:cNvSpPr>
+            <a:spLocks noGrp="1"/>
+          </p:cNvSpPr>
+          <p:nvPr>
+            <p:ph type="body" idx="1"/>
+          </p:nvPr>
+        </p:nvSpPr>
+        <p:spPr/>
+        <p:txBody>
+          <a:bodyPr/>
+          <a:lstStyle/>
+          <a:p>
+            <a:endParaRPr lang="en-US" dirty="0"/>
+          </a:p>
+        </p:txBody>
+      </p:sp>
+      <p:sp>
+        <p:nvSpPr>
+          <p:cNvPr id="4" name="Slide Number Placeholder 3"/>
+          <p:cNvSpPr>
+            <a:spLocks noGrp="1"/>
+          </p:cNvSpPr>
+          <p:nvPr>
+            <p:ph type="sldNum" sz="quarter" idx="10"/>
+          </p:nvPr>
+        </p:nvSpPr>
+        <p:spPr/>
+        <p:txBody>
+          <a:bodyPr/>
+          <a:lstStyle/>
+          <a:p>
+            <a:fld id="{F7021451-1387-4CA6-816F-3879F97B5CBC}" type="slidenum">
+              <a:rPr lang="en-US"/>
+              <a:t>10</a:t>
+            </a:fld>
+            <a:endParaRPr lang="en-US"/>
+          </a:p>
+        </p:txBody>
+      </p:sp>
+    </p:spTree>
+    <p:extLst>
+      <p:ext uri="{BB962C8B-B14F-4D97-AF65-F5344CB8AC3E}">
+        <p14:creationId xmlns:p14="http://schemas.microsoft.com/office/powerpoint/2010/main" val="1024086991"/>
+      </p:ext>
+    </p:extLst>
+  </p:cSld>
+  <p:clrMapOvr>
+    <a:masterClrMapping/>
+  </p:clrMapOvr>
+</p:notes>
+</file>
+
+<file path=ppt/notesSlides/notesSlide11.xml><?xml version="1.0" encoding="utf-8"?>
+<p:notes xmlns:a="http://schemas.openxmlformats.org/drawingml/2006/main" xmlns:r="http://schemas.openxmlformats.org/officeDocument/2006/relationships" xmlns:p="http://schemas.openxmlformats.org/presentationml/2006/main">
+  <p:cSld>
+    <p:spTree>
+      <p:nvGrpSpPr>
+        <p:cNvPr id="1" name=""/>
+        <p:cNvGrpSpPr/>
+        <p:nvPr/>
+      </p:nvGrpSpPr>
+      <p:grpSpPr>
+        <a:xfrm>
+          <a:off x="0" y="0"/>
+          <a:ext cx="0" cy="0"/>
+          <a:chOff x="0" y="0"/>
+          <a:chExt cx="0" cy="0"/>
+        </a:xfrm>
+      </p:grpSpPr>
+      <p:sp>
+        <p:nvSpPr>
+          <p:cNvPr id="2" name="Slide Image Placeholder 1"/>
+          <p:cNvSpPr>
+            <a:spLocks noGrp="1" noRot="1" noChangeAspect="1"/>
+          </p:cNvSpPr>
+          <p:nvPr>
+            <p:ph type="sldImg"/>
+          </p:nvPr>
+        </p:nvSpPr>
+        <p:spPr/>
+      </p:sp>
+      <p:sp>
+        <p:nvSpPr>
+          <p:cNvPr id="3" name="Notes Placeholder 2"/>
+          <p:cNvSpPr>
+            <a:spLocks noGrp="1"/>
+          </p:cNvSpPr>
+          <p:nvPr>
+            <p:ph type="body" idx="1"/>
+          </p:nvPr>
+        </p:nvSpPr>
+        <p:spPr/>
+        <p:txBody>
+          <a:bodyPr/>
+          <a:lstStyle/>
+          <a:p>
+            <a:endParaRPr lang="en-US" dirty="0"/>
+          </a:p>
+        </p:txBody>
+      </p:sp>
+      <p:sp>
+        <p:nvSpPr>
+          <p:cNvPr id="4" name="Slide Number Placeholder 3"/>
+          <p:cNvSpPr>
+            <a:spLocks noGrp="1"/>
+          </p:cNvSpPr>
+          <p:nvPr>
+            <p:ph type="sldNum" sz="quarter" idx="10"/>
+          </p:nvPr>
+        </p:nvSpPr>
+        <p:spPr/>
+        <p:txBody>
+          <a:bodyPr/>
+          <a:lstStyle/>
+          <a:p>
+            <a:fld id="{F7021451-1387-4CA6-816F-3879F97B5CBC}" type="slidenum">
+              <a:rPr lang="en-US"/>
+              <a:t>11</a:t>
             </a:fld>
             <a:endParaRPr lang="en-US"/>
           </a:p>
@@ -596,10 +543,6 @@
           <a:bodyPr/>
           <a:lstStyle/>
           <a:p>
-            <a:r>
-              <a:rPr lang="en-US" dirty="0"/>
-              <a:t/>
-            </a:r>
             <a:endParaRPr lang="en-US" dirty="0"/>
           </a:p>
         </p:txBody>
@@ -684,10 +627,6 @@
           <a:bodyPr/>
           <a:lstStyle/>
           <a:p>
-            <a:r>
-              <a:rPr lang="en-US" dirty="0"/>
-              <a:t/>
-            </a:r>
             <a:endParaRPr lang="en-US" dirty="0"/>
           </a:p>
         </p:txBody>
@@ -772,10 +711,6 @@
           <a:bodyPr/>
           <a:lstStyle/>
           <a:p>
-            <a:r>
-              <a:rPr lang="en-US" dirty="0"/>
-              <a:t/>
-            </a:r>
             <a:endParaRPr lang="en-US" dirty="0"/>
           </a:p>
         </p:txBody>
@@ -860,10 +795,6 @@
           <a:bodyPr/>
           <a:lstStyle/>
           <a:p>
-            <a:r>
-              <a:rPr lang="en-US" dirty="0"/>
-              <a:t/>
-            </a:r>
             <a:endParaRPr lang="en-US" dirty="0"/>
           </a:p>
         </p:txBody>
@@ -948,10 +879,6 @@
           <a:bodyPr/>
           <a:lstStyle/>
           <a:p>
-            <a:r>
-              <a:rPr lang="en-US" dirty="0"/>
-              <a:t/>
-            </a:r>
             <a:endParaRPr lang="en-US" dirty="0"/>
           </a:p>
         </p:txBody>
@@ -1036,10 +963,6 @@
           <a:bodyPr/>
           <a:lstStyle/>
           <a:p>
-            <a:r>
-              <a:rPr lang="en-US" dirty="0"/>
-              <a:t/>
-            </a:r>
             <a:endParaRPr lang="en-US" dirty="0"/>
           </a:p>
         </p:txBody>
@@ -1124,10 +1047,6 @@
           <a:bodyPr/>
           <a:lstStyle/>
           <a:p>
-            <a:r>
-              <a:rPr lang="en-US" dirty="0"/>
-              <a:t/>
-            </a:r>
             <a:endParaRPr lang="en-US" dirty="0"/>
           </a:p>
         </p:txBody>
@@ -1212,10 +1131,6 @@
           <a:bodyPr/>
           <a:lstStyle/>
           <a:p>
-            <a:r>
-              <a:rPr lang="en-US" dirty="0"/>
-              <a:t/>
-            </a:r>
             <a:endParaRPr lang="en-US" dirty="0"/>
           </a:p>
         </p:txBody>
@@ -1289,6 +1204,11 @@
 <file path=ppt/slideMasters/slideMaster1.xml><?xml version="1.0" encoding="utf-8"?>
 <p:sldMaster xmlns:a="http://schemas.openxmlformats.org/drawingml/2006/main" xmlns:r="http://schemas.openxmlformats.org/officeDocument/2006/relationships" xmlns:p="http://schemas.openxmlformats.org/presentationml/2006/main">
   <p:cSld>
+    <p:bg>
+      <p:bgRef idx="1001">
+        <a:schemeClr val="bg1"/>
+      </p:bgRef>
+    </p:bg>
     <p:spTree>
       <p:nvGrpSpPr>
         <p:cNvPr id="1" name=""/>
@@ -1571,6 +1491,7 @@
         <a:solidFill>
           <a:srgbClr val="0F172A"/>
         </a:solidFill>
+        <a:effectLst/>
       </p:bgPr>
     </p:bg>
     <p:spTree>
@@ -1611,6 +1532,13 @@
             <a:prstDash val="solid"/>
           </a:ln>
         </p:spPr>
+        <p:txBody>
+          <a:bodyPr/>
+          <a:lstStyle/>
+          <a:p>
+            <a:endParaRPr lang="zh-CN" altLang="en-US"/>
+          </a:p>
+        </p:txBody>
       </p:sp>
       <p:sp>
         <p:nvSpPr>
@@ -1633,7 +1561,7 @@
           <a:bodyPr wrap="square" lIns="0" tIns="0" rIns="0" bIns="0" rtlCol="0" anchor="ctr"/>
           <a:lstStyle/>
           <a:p>
-            <a:pPr algn="ctr" indent="0" marL="0">
+            <a:pPr marL="0" indent="0" algn="ctr">
               <a:buNone/>
             </a:pPr>
             <a:r>
@@ -1669,7 +1597,7 @@
           <a:bodyPr wrap="square" lIns="0" tIns="0" rIns="0" bIns="0" rtlCol="0" anchor="ctr"/>
           <a:lstStyle/>
           <a:p>
-            <a:pPr algn="ctr" indent="0" marL="0">
+            <a:pPr marL="0" indent="0" algn="ctr">
               <a:buNone/>
             </a:pPr>
             <a:r>
@@ -1708,6 +1636,13 @@
             <a:prstDash val="solid"/>
           </a:ln>
         </p:spPr>
+        <p:txBody>
+          <a:bodyPr/>
+          <a:lstStyle/>
+          <a:p>
+            <a:endParaRPr lang="zh-CN" altLang="en-US"/>
+          </a:p>
+        </p:txBody>
       </p:sp>
       <p:sp>
         <p:nvSpPr>
@@ -1730,7 +1665,7 @@
           <a:bodyPr wrap="square" lIns="0" tIns="0" rIns="0" bIns="0" rtlCol="0" anchor="ctr"/>
           <a:lstStyle/>
           <a:p>
-            <a:pPr algn="ctr" indent="0" marL="0">
+            <a:pPr marL="0" indent="0" algn="ctr">
               <a:buNone/>
             </a:pPr>
             <a:r>
@@ -1766,7 +1701,7 @@
           <a:bodyPr wrap="square" lIns="0" tIns="0" rIns="0" bIns="0" rtlCol="0" anchor="ctr"/>
           <a:lstStyle/>
           <a:p>
-            <a:pPr algn="ctr" indent="0" marL="0">
+            <a:pPr marL="0" indent="0" algn="ctr">
               <a:buNone/>
             </a:pPr>
             <a:r>
@@ -1778,6 +1713,995 @@
               <a:t>2026-04-03</a:t>
             </a:r>
             <a:endParaRPr lang="en-US" sz="900" dirty="0"/>
+          </a:p>
+        </p:txBody>
+      </p:sp>
+    </p:spTree>
+  </p:cSld>
+  <p:clrMapOvr>
+    <a:masterClrMapping/>
+  </p:clrMapOvr>
+</p:sld>
+</file>
+
+<file path=ppt/slides/slide10.xml><?xml version="1.0" encoding="utf-8"?>
+<p:sld xmlns:a="http://schemas.openxmlformats.org/drawingml/2006/main" xmlns:r="http://schemas.openxmlformats.org/officeDocument/2006/relationships" xmlns:p="http://schemas.openxmlformats.org/presentationml/2006/main">
+  <p:cSld name="Slide 11">
+    <p:bg>
+      <p:bgPr>
+        <a:solidFill>
+          <a:srgbClr val="0F172A"/>
+        </a:solidFill>
+        <a:effectLst/>
+      </p:bgPr>
+    </p:bg>
+    <p:spTree>
+      <p:nvGrpSpPr>
+        <p:cNvPr id="1" name=""/>
+        <p:cNvGrpSpPr/>
+        <p:nvPr/>
+      </p:nvGrpSpPr>
+      <p:grpSpPr>
+        <a:xfrm>
+          <a:off x="0" y="0"/>
+          <a:ext cx="0" cy="0"/>
+          <a:chOff x="0" y="0"/>
+          <a:chExt cx="0" cy="0"/>
+        </a:xfrm>
+      </p:grpSpPr>
+      <p:sp>
+        <p:nvSpPr>
+          <p:cNvPr id="2" name="Shape 0"/>
+          <p:cNvSpPr/>
+          <p:nvPr/>
+        </p:nvSpPr>
+        <p:spPr>
+          <a:xfrm>
+            <a:off x="457200" y="347472"/>
+            <a:ext cx="54864" cy="502920"/>
+          </a:xfrm>
+          <a:prstGeom prst="rect">
+            <a:avLst/>
+          </a:prstGeom>
+          <a:solidFill>
+            <a:srgbClr val="F97316"/>
+          </a:solidFill>
+          <a:ln w="12700">
+            <a:solidFill>
+              <a:srgbClr val="F97316"/>
+            </a:solidFill>
+            <a:prstDash val="solid"/>
+          </a:ln>
+        </p:spPr>
+        <p:txBody>
+          <a:bodyPr/>
+          <a:lstStyle/>
+          <a:p>
+            <a:endParaRPr lang="zh-CN" altLang="en-US"/>
+          </a:p>
+        </p:txBody>
+      </p:sp>
+      <p:sp>
+        <p:nvSpPr>
+          <p:cNvPr id="3" name="Text 1"/>
+          <p:cNvSpPr/>
+          <p:nvPr/>
+        </p:nvSpPr>
+        <p:spPr>
+          <a:xfrm>
+            <a:off x="594360" y="320040"/>
+            <a:ext cx="7315200" cy="256032"/>
+          </a:xfrm>
+          <a:prstGeom prst="rect">
+            <a:avLst/>
+          </a:prstGeom>
+          <a:noFill/>
+          <a:ln/>
+        </p:spPr>
+        <p:txBody>
+          <a:bodyPr wrap="square" lIns="0" tIns="0" rIns="0" bIns="0" rtlCol="0" anchor="ctr"/>
+          <a:lstStyle/>
+          <a:p>
+            <a:pPr marL="0" indent="0">
+              <a:buNone/>
+            </a:pPr>
+            <a:r>
+              <a:rPr lang="en-US" sz="900" b="1" kern="0" spc="300" dirty="0">
+                <a:solidFill>
+                  <a:srgbClr val="F97316"/>
+                </a:solidFill>
+              </a:rPr>
+              <a:t>PRICING</a:t>
+            </a:r>
+            <a:endParaRPr lang="en-US" sz="900" dirty="0"/>
+          </a:p>
+        </p:txBody>
+      </p:sp>
+      <p:sp>
+        <p:nvSpPr>
+          <p:cNvPr id="4" name="Text 2"/>
+          <p:cNvSpPr/>
+          <p:nvPr/>
+        </p:nvSpPr>
+        <p:spPr>
+          <a:xfrm>
+            <a:off x="594360" y="548640"/>
+            <a:ext cx="7772400" cy="457200"/>
+          </a:xfrm>
+          <a:prstGeom prst="rect">
+            <a:avLst/>
+          </a:prstGeom>
+          <a:noFill/>
+          <a:ln/>
+        </p:spPr>
+        <p:txBody>
+          <a:bodyPr wrap="square" lIns="0" tIns="0" rIns="0" bIns="0" rtlCol="0" anchor="ctr"/>
+          <a:lstStyle/>
+          <a:p>
+            <a:pPr marL="0" indent="0">
+              <a:buNone/>
+            </a:pPr>
+            <a:r>
+              <a:rPr lang="en-US" sz="2200" b="1" dirty="0">
+                <a:solidFill>
+                  <a:srgbClr val="F8FAFC"/>
+                </a:solidFill>
+              </a:rPr>
+              <a:t>项目报价 - 服务范围 &amp; 总报价</a:t>
+            </a:r>
+            <a:endParaRPr lang="en-US" sz="2200" dirty="0"/>
+          </a:p>
+        </p:txBody>
+      </p:sp>
+      <p:sp>
+        <p:nvSpPr>
+          <p:cNvPr id="5" name="Shape 3"/>
+          <p:cNvSpPr/>
+          <p:nvPr/>
+        </p:nvSpPr>
+        <p:spPr>
+          <a:xfrm>
+            <a:off x="457200" y="1143000"/>
+            <a:ext cx="3931920" cy="3566160"/>
+          </a:xfrm>
+          <a:prstGeom prst="rect">
+            <a:avLst/>
+          </a:prstGeom>
+          <a:solidFill>
+            <a:srgbClr val="1E293B"/>
+          </a:solidFill>
+          <a:ln w="6350">
+            <a:solidFill>
+              <a:srgbClr val="334155"/>
+            </a:solidFill>
+            <a:prstDash val="solid"/>
+          </a:ln>
+          <a:effectLst>
+            <a:outerShdw blurRad="101600" dist="38100" dir="8100000" algn="bl" rotWithShape="0">
+              <a:srgbClr val="000000">
+                <a:alpha val="25000"/>
+              </a:srgbClr>
+            </a:outerShdw>
+          </a:effectLst>
+        </p:spPr>
+        <p:txBody>
+          <a:bodyPr/>
+          <a:lstStyle/>
+          <a:p>
+            <a:endParaRPr lang="zh-CN" altLang="en-US"/>
+          </a:p>
+        </p:txBody>
+      </p:sp>
+      <p:sp>
+        <p:nvSpPr>
+          <p:cNvPr id="6" name="Shape 4"/>
+          <p:cNvSpPr/>
+          <p:nvPr/>
+        </p:nvSpPr>
+        <p:spPr>
+          <a:xfrm>
+            <a:off x="457200" y="1143000"/>
+            <a:ext cx="45720" cy="3566160"/>
+          </a:xfrm>
+          <a:prstGeom prst="rect">
+            <a:avLst/>
+          </a:prstGeom>
+          <a:solidFill>
+            <a:srgbClr val="0D9488"/>
+          </a:solidFill>
+          <a:ln w="12700">
+            <a:solidFill>
+              <a:srgbClr val="0D9488"/>
+            </a:solidFill>
+            <a:prstDash val="solid"/>
+          </a:ln>
+        </p:spPr>
+        <p:txBody>
+          <a:bodyPr/>
+          <a:lstStyle/>
+          <a:p>
+            <a:endParaRPr lang="zh-CN" altLang="en-US"/>
+          </a:p>
+        </p:txBody>
+      </p:sp>
+      <p:sp>
+        <p:nvSpPr>
+          <p:cNvPr id="7" name="Text 5"/>
+          <p:cNvSpPr/>
+          <p:nvPr/>
+        </p:nvSpPr>
+        <p:spPr>
+          <a:xfrm>
+            <a:off x="594360" y="1234440"/>
+            <a:ext cx="3749040" cy="274320"/>
+          </a:xfrm>
+          <a:prstGeom prst="rect">
+            <a:avLst/>
+          </a:prstGeom>
+          <a:noFill/>
+          <a:ln/>
+        </p:spPr>
+        <p:txBody>
+          <a:bodyPr wrap="square" lIns="0" tIns="0" rIns="0" bIns="0" rtlCol="0" anchor="ctr"/>
+          <a:lstStyle/>
+          <a:p>
+            <a:pPr marL="0" indent="0">
+              <a:buNone/>
+            </a:pPr>
+            <a:r>
+              <a:rPr lang="en-US" sz="1100" b="1" dirty="0">
+                <a:solidFill>
+                  <a:srgbClr val="F8FAFC"/>
+                </a:solidFill>
+              </a:rPr>
+              <a:t>四、服务范围</a:t>
+            </a:r>
+            <a:endParaRPr lang="en-US" sz="1100" dirty="0"/>
+          </a:p>
+        </p:txBody>
+      </p:sp>
+      <p:sp>
+        <p:nvSpPr>
+          <p:cNvPr id="8" name="Text 6"/>
+          <p:cNvSpPr/>
+          <p:nvPr/>
+        </p:nvSpPr>
+        <p:spPr>
+          <a:xfrm>
+            <a:off x="594360" y="1554480"/>
+            <a:ext cx="3749040" cy="3035808"/>
+          </a:xfrm>
+          <a:prstGeom prst="rect">
+            <a:avLst/>
+          </a:prstGeom>
+          <a:noFill/>
+          <a:ln/>
+        </p:spPr>
+        <p:txBody>
+          <a:bodyPr wrap="square" lIns="0" tIns="0" rIns="0" bIns="0" rtlCol="0" anchor="ctr"/>
+          <a:lstStyle/>
+          <a:p>
+            <a:pPr marL="342900" indent="-342900">
+              <a:buSzPct val="100000"/>
+              <a:buChar char="•"/>
+            </a:pPr>
+            <a:r>
+              <a:rPr lang="en-US" sz="950" dirty="0">
+                <a:solidFill>
+                  <a:srgbClr val="94A3B8"/>
+                </a:solidFill>
+              </a:rPr>
+              <a:t>负责开发</a:t>
+            </a:r>
+            <a:endParaRPr lang="en-US" sz="950" dirty="0"/>
+          </a:p>
+          <a:p>
+            <a:pPr marL="342900" indent="-342900">
+              <a:buSzPct val="100000"/>
+              <a:buChar char="•"/>
+            </a:pPr>
+            <a:r>
+              <a:rPr lang="en-US" sz="950" dirty="0">
+                <a:solidFill>
+                  <a:srgbClr val="94A3B8"/>
+                </a:solidFill>
+              </a:rPr>
+              <a:t>负责数据对接</a:t>
+            </a:r>
+            <a:endParaRPr lang="en-US" sz="950" dirty="0"/>
+          </a:p>
+          <a:p>
+            <a:pPr marL="342900" indent="-342900">
+              <a:buSzPct val="100000"/>
+              <a:buChar char="•"/>
+            </a:pPr>
+            <a:r>
+              <a:rPr lang="en-US" sz="950" dirty="0">
+                <a:solidFill>
+                  <a:srgbClr val="94A3B8"/>
+                </a:solidFill>
+              </a:rPr>
+              <a:t>负责部署</a:t>
+            </a:r>
+            <a:endParaRPr lang="en-US" sz="950" dirty="0"/>
+          </a:p>
+          <a:p>
+            <a:pPr marL="342900" indent="-342900">
+              <a:buSzPct val="100000"/>
+              <a:buChar char="•"/>
+            </a:pPr>
+            <a:endParaRPr lang="en-US" sz="950" dirty="0"/>
+          </a:p>
+          <a:p>
+            <a:pPr marL="342900" indent="-342900">
+              <a:buSzPct val="100000"/>
+              <a:buChar char="•"/>
+            </a:pPr>
+            <a:r>
+              <a:rPr lang="en-US" sz="950" dirty="0">
+                <a:solidFill>
+                  <a:srgbClr val="94A3B8"/>
+                </a:solidFill>
+              </a:rPr>
+              <a:t>不负责後续营运</a:t>
+            </a:r>
+            <a:endParaRPr lang="en-US" sz="950" dirty="0"/>
+          </a:p>
+        </p:txBody>
+      </p:sp>
+      <p:sp>
+        <p:nvSpPr>
+          <p:cNvPr id="9" name="Shape 7"/>
+          <p:cNvSpPr/>
+          <p:nvPr/>
+        </p:nvSpPr>
+        <p:spPr>
+          <a:xfrm>
+            <a:off x="4754880" y="1143000"/>
+            <a:ext cx="3931920" cy="3566160"/>
+          </a:xfrm>
+          <a:prstGeom prst="rect">
+            <a:avLst/>
+          </a:prstGeom>
+          <a:solidFill>
+            <a:srgbClr val="1E293B"/>
+          </a:solidFill>
+          <a:ln w="6350">
+            <a:solidFill>
+              <a:srgbClr val="334155"/>
+            </a:solidFill>
+            <a:prstDash val="solid"/>
+          </a:ln>
+          <a:effectLst>
+            <a:outerShdw blurRad="101600" dist="38100" dir="8100000" algn="bl" rotWithShape="0">
+              <a:srgbClr val="000000">
+                <a:alpha val="25000"/>
+              </a:srgbClr>
+            </a:outerShdw>
+          </a:effectLst>
+        </p:spPr>
+        <p:txBody>
+          <a:bodyPr/>
+          <a:lstStyle/>
+          <a:p>
+            <a:endParaRPr lang="zh-CN" altLang="en-US"/>
+          </a:p>
+        </p:txBody>
+      </p:sp>
+      <p:sp>
+        <p:nvSpPr>
+          <p:cNvPr id="10" name="Shape 8"/>
+          <p:cNvSpPr/>
+          <p:nvPr/>
+        </p:nvSpPr>
+        <p:spPr>
+          <a:xfrm>
+            <a:off x="4754880" y="1143000"/>
+            <a:ext cx="45720" cy="3566160"/>
+          </a:xfrm>
+          <a:prstGeom prst="rect">
+            <a:avLst/>
+          </a:prstGeom>
+          <a:solidFill>
+            <a:srgbClr val="EF4444"/>
+          </a:solidFill>
+          <a:ln w="12700">
+            <a:solidFill>
+              <a:srgbClr val="EF4444"/>
+            </a:solidFill>
+            <a:prstDash val="solid"/>
+          </a:ln>
+        </p:spPr>
+        <p:txBody>
+          <a:bodyPr/>
+          <a:lstStyle/>
+          <a:p>
+            <a:endParaRPr lang="zh-CN" altLang="en-US"/>
+          </a:p>
+        </p:txBody>
+      </p:sp>
+      <p:sp>
+        <p:nvSpPr>
+          <p:cNvPr id="11" name="Text 9"/>
+          <p:cNvSpPr/>
+          <p:nvPr/>
+        </p:nvSpPr>
+        <p:spPr>
+          <a:xfrm>
+            <a:off x="4892040" y="1234440"/>
+            <a:ext cx="3657600" cy="320040"/>
+          </a:xfrm>
+          <a:prstGeom prst="rect">
+            <a:avLst/>
+          </a:prstGeom>
+          <a:noFill/>
+          <a:ln/>
+        </p:spPr>
+        <p:txBody>
+          <a:bodyPr wrap="square" lIns="0" tIns="0" rIns="0" bIns="0" rtlCol="0" anchor="ctr"/>
+          <a:lstStyle/>
+          <a:p>
+            <a:pPr marL="0" indent="0">
+              <a:buNone/>
+            </a:pPr>
+            <a:r>
+              <a:rPr lang="en-US" sz="1200" b="1" dirty="0">
+                <a:solidFill>
+                  <a:srgbClr val="F8FAFC"/>
+                </a:solidFill>
+              </a:rPr>
+              <a:t>五、总报价</a:t>
+            </a:r>
+            <a:endParaRPr lang="en-US" sz="1200" dirty="0"/>
+          </a:p>
+        </p:txBody>
+      </p:sp>
+      <p:sp>
+        <p:nvSpPr>
+          <p:cNvPr id="12" name="Shape 10"/>
+          <p:cNvSpPr/>
+          <p:nvPr/>
+        </p:nvSpPr>
+        <p:spPr>
+          <a:xfrm>
+            <a:off x="4892040" y="1645920"/>
+            <a:ext cx="3566160" cy="36576"/>
+          </a:xfrm>
+          <a:prstGeom prst="rect">
+            <a:avLst/>
+          </a:prstGeom>
+          <a:solidFill>
+            <a:srgbClr val="334155"/>
+          </a:solidFill>
+          <a:ln w="12700">
+            <a:solidFill>
+              <a:srgbClr val="334155"/>
+            </a:solidFill>
+            <a:prstDash val="solid"/>
+          </a:ln>
+        </p:spPr>
+        <p:txBody>
+          <a:bodyPr/>
+          <a:lstStyle/>
+          <a:p>
+            <a:endParaRPr lang="zh-CN" altLang="en-US"/>
+          </a:p>
+        </p:txBody>
+      </p:sp>
+      <p:sp>
+        <p:nvSpPr>
+          <p:cNvPr id="13" name="Text 11"/>
+          <p:cNvSpPr/>
+          <p:nvPr/>
+        </p:nvSpPr>
+        <p:spPr>
+          <a:xfrm>
+            <a:off x="4892040" y="1783080"/>
+            <a:ext cx="3566160" cy="228600"/>
+          </a:xfrm>
+          <a:prstGeom prst="rect">
+            <a:avLst/>
+          </a:prstGeom>
+          <a:noFill/>
+          <a:ln/>
+        </p:spPr>
+        <p:txBody>
+          <a:bodyPr wrap="square" lIns="0" tIns="0" rIns="0" bIns="0" rtlCol="0" anchor="ctr"/>
+          <a:lstStyle/>
+          <a:p>
+            <a:pPr marL="0" indent="0">
+              <a:buNone/>
+            </a:pPr>
+            <a:r>
+              <a:rPr lang="en-US" sz="1000" dirty="0">
+                <a:solidFill>
+                  <a:srgbClr val="94A3B8"/>
+                </a:solidFill>
+              </a:rPr>
+              <a:t>新台幣</a:t>
+            </a:r>
+            <a:endParaRPr lang="en-US" sz="1000" dirty="0"/>
+          </a:p>
+        </p:txBody>
+      </p:sp>
+      <p:sp>
+        <p:nvSpPr>
+          <p:cNvPr id="14" name="Text 12"/>
+          <p:cNvSpPr/>
+          <p:nvPr/>
+        </p:nvSpPr>
+        <p:spPr>
+          <a:xfrm>
+            <a:off x="4892040" y="2103120"/>
+            <a:ext cx="3566160" cy="731520"/>
+          </a:xfrm>
+          <a:prstGeom prst="rect">
+            <a:avLst/>
+          </a:prstGeom>
+          <a:noFill/>
+          <a:ln/>
+        </p:spPr>
+        <p:txBody>
+          <a:bodyPr wrap="square" lIns="0" tIns="0" rIns="0" bIns="0" rtlCol="0" anchor="ctr"/>
+          <a:lstStyle/>
+          <a:p>
+            <a:pPr marL="0" indent="0" algn="ctr">
+              <a:buNone/>
+            </a:pPr>
+            <a:r>
+              <a:rPr lang="en-US" sz="3600" b="1" dirty="0">
+                <a:solidFill>
+                  <a:srgbClr val="EF4444"/>
+                </a:solidFill>
+              </a:rPr>
+              <a:t>420,000 元整</a:t>
+            </a:r>
+            <a:endParaRPr lang="en-US" sz="3600" dirty="0"/>
+          </a:p>
+        </p:txBody>
+      </p:sp>
+      <p:sp>
+        <p:nvSpPr>
+          <p:cNvPr id="15" name="Shape 13"/>
+          <p:cNvSpPr/>
+          <p:nvPr/>
+        </p:nvSpPr>
+        <p:spPr>
+          <a:xfrm>
+            <a:off x="4892040" y="2926080"/>
+            <a:ext cx="3566160" cy="36576"/>
+          </a:xfrm>
+          <a:prstGeom prst="rect">
+            <a:avLst/>
+          </a:prstGeom>
+          <a:solidFill>
+            <a:srgbClr val="334155"/>
+          </a:solidFill>
+          <a:ln w="12700">
+            <a:solidFill>
+              <a:srgbClr val="334155"/>
+            </a:solidFill>
+            <a:prstDash val="solid"/>
+          </a:ln>
+        </p:spPr>
+        <p:txBody>
+          <a:bodyPr/>
+          <a:lstStyle/>
+          <a:p>
+            <a:endParaRPr lang="zh-CN" altLang="en-US"/>
+          </a:p>
+        </p:txBody>
+      </p:sp>
+      <p:sp>
+        <p:nvSpPr>
+          <p:cNvPr id="16" name="Text 14"/>
+          <p:cNvSpPr/>
+          <p:nvPr/>
+        </p:nvSpPr>
+        <p:spPr>
+          <a:xfrm>
+            <a:off x="4892040" y="3063240"/>
+            <a:ext cx="3566160" cy="228600"/>
+          </a:xfrm>
+          <a:prstGeom prst="rect">
+            <a:avLst/>
+          </a:prstGeom>
+          <a:noFill/>
+          <a:ln/>
+        </p:spPr>
+        <p:txBody>
+          <a:bodyPr wrap="square" lIns="0" tIns="0" rIns="0" bIns="0" rtlCol="0" anchor="ctr"/>
+          <a:lstStyle/>
+          <a:p>
+            <a:pPr marL="0" indent="0">
+              <a:buNone/>
+            </a:pPr>
+            <a:r>
+              <a:rPr lang="en-US" sz="900" dirty="0">
+                <a:solidFill>
+                  <a:srgbClr val="94A3B8"/>
+                </a:solidFill>
+              </a:rPr>
+              <a:t>包含：人工成本 + 算力费用</a:t>
+            </a:r>
+            <a:endParaRPr lang="en-US" sz="900" dirty="0"/>
+          </a:p>
+        </p:txBody>
+      </p:sp>
+      <p:sp>
+        <p:nvSpPr>
+          <p:cNvPr id="17" name="Text 15"/>
+          <p:cNvSpPr/>
+          <p:nvPr/>
+        </p:nvSpPr>
+        <p:spPr>
+          <a:xfrm>
+            <a:off x="4892040" y="3337560"/>
+            <a:ext cx="3566160" cy="228600"/>
+          </a:xfrm>
+          <a:prstGeom prst="rect">
+            <a:avLst/>
+          </a:prstGeom>
+          <a:noFill/>
+          <a:ln/>
+        </p:spPr>
+        <p:txBody>
+          <a:bodyPr wrap="square" lIns="0" tIns="0" rIns="0" bIns="0" rtlCol="0" anchor="ctr"/>
+          <a:lstStyle/>
+          <a:p>
+            <a:pPr marL="0" indent="0">
+              <a:buNone/>
+            </a:pPr>
+            <a:r>
+              <a:rPr lang="en-US" sz="900" dirty="0">
+                <a:solidFill>
+                  <a:srgbClr val="94A3B8"/>
+                </a:solidFill>
+              </a:rPr>
+              <a:t>不含：後续营运 + 月度数据成本</a:t>
+            </a:r>
+            <a:endParaRPr lang="en-US" sz="900" dirty="0"/>
+          </a:p>
+        </p:txBody>
+      </p:sp>
+    </p:spTree>
+  </p:cSld>
+  <p:clrMapOvr>
+    <a:masterClrMapping/>
+  </p:clrMapOvr>
+</p:sld>
+</file>
+
+<file path=ppt/slides/slide11.xml><?xml version="1.0" encoding="utf-8"?>
+<p:sld xmlns:a="http://schemas.openxmlformats.org/drawingml/2006/main" xmlns:r="http://schemas.openxmlformats.org/officeDocument/2006/relationships" xmlns:p="http://schemas.openxmlformats.org/presentationml/2006/main">
+  <p:cSld name="Slide 12">
+    <p:bg>
+      <p:bgPr>
+        <a:solidFill>
+          <a:srgbClr val="0F172A"/>
+        </a:solidFill>
+        <a:effectLst/>
+      </p:bgPr>
+    </p:bg>
+    <p:spTree>
+      <p:nvGrpSpPr>
+        <p:cNvPr id="1" name=""/>
+        <p:cNvGrpSpPr/>
+        <p:nvPr/>
+      </p:nvGrpSpPr>
+      <p:grpSpPr>
+        <a:xfrm>
+          <a:off x="0" y="0"/>
+          <a:ext cx="0" cy="0"/>
+          <a:chOff x="0" y="0"/>
+          <a:chExt cx="0" cy="0"/>
+        </a:xfrm>
+      </p:grpSpPr>
+      <p:sp>
+        <p:nvSpPr>
+          <p:cNvPr id="2" name="Shape 0"/>
+          <p:cNvSpPr/>
+          <p:nvPr/>
+        </p:nvSpPr>
+        <p:spPr>
+          <a:xfrm>
+            <a:off x="0" y="0"/>
+            <a:ext cx="9144000" cy="73152"/>
+          </a:xfrm>
+          <a:prstGeom prst="rect">
+            <a:avLst/>
+          </a:prstGeom>
+          <a:solidFill>
+            <a:srgbClr val="F97316"/>
+          </a:solidFill>
+          <a:ln w="12700">
+            <a:solidFill>
+              <a:srgbClr val="F97316"/>
+            </a:solidFill>
+            <a:prstDash val="solid"/>
+          </a:ln>
+        </p:spPr>
+        <p:txBody>
+          <a:bodyPr/>
+          <a:lstStyle/>
+          <a:p>
+            <a:endParaRPr lang="zh-CN" altLang="en-US"/>
+          </a:p>
+        </p:txBody>
+      </p:sp>
+      <p:sp>
+        <p:nvSpPr>
+          <p:cNvPr id="3" name="Shape 1"/>
+          <p:cNvSpPr/>
+          <p:nvPr/>
+        </p:nvSpPr>
+        <p:spPr>
+          <a:xfrm>
+            <a:off x="0" y="5070348"/>
+            <a:ext cx="9144000" cy="73152"/>
+          </a:xfrm>
+          <a:prstGeom prst="rect">
+            <a:avLst/>
+          </a:prstGeom>
+          <a:solidFill>
+            <a:srgbClr val="EF4444"/>
+          </a:solidFill>
+          <a:ln w="12700">
+            <a:solidFill>
+              <a:srgbClr val="EF4444"/>
+            </a:solidFill>
+            <a:prstDash val="solid"/>
+          </a:ln>
+        </p:spPr>
+        <p:txBody>
+          <a:bodyPr/>
+          <a:lstStyle/>
+          <a:p>
+            <a:endParaRPr lang="zh-CN" altLang="en-US"/>
+          </a:p>
+        </p:txBody>
+      </p:sp>
+      <p:sp>
+        <p:nvSpPr>
+          <p:cNvPr id="4" name="Text 2"/>
+          <p:cNvSpPr/>
+          <p:nvPr/>
+        </p:nvSpPr>
+        <p:spPr>
+          <a:xfrm>
+            <a:off x="640080" y="1097280"/>
+            <a:ext cx="7863840" cy="548640"/>
+          </a:xfrm>
+          <a:prstGeom prst="rect">
+            <a:avLst/>
+          </a:prstGeom>
+          <a:noFill/>
+          <a:ln/>
+        </p:spPr>
+        <p:txBody>
+          <a:bodyPr wrap="square" lIns="0" tIns="0" rIns="0" bIns="0" rtlCol="0" anchor="ctr"/>
+          <a:lstStyle/>
+          <a:p>
+            <a:pPr marL="0" indent="0" algn="ctr">
+              <a:buNone/>
+            </a:pPr>
+            <a:r>
+              <a:rPr lang="en-US" sz="3200" b="1" dirty="0">
+                <a:solidFill>
+                  <a:srgbClr val="F8FAFC"/>
+                </a:solidFill>
+              </a:rPr>
+              <a:t>Signal Nine Sports</a:t>
+            </a:r>
+            <a:endParaRPr lang="en-US" sz="3200" dirty="0"/>
+          </a:p>
+        </p:txBody>
+      </p:sp>
+      <p:sp>
+        <p:nvSpPr>
+          <p:cNvPr id="5" name="Text 3"/>
+          <p:cNvSpPr/>
+          <p:nvPr/>
+        </p:nvSpPr>
+        <p:spPr>
+          <a:xfrm>
+            <a:off x="640080" y="1737360"/>
+            <a:ext cx="7863840" cy="457200"/>
+          </a:xfrm>
+          <a:prstGeom prst="rect">
+            <a:avLst/>
+          </a:prstGeom>
+          <a:noFill/>
+          <a:ln/>
+        </p:spPr>
+        <p:txBody>
+          <a:bodyPr wrap="square" lIns="0" tIns="0" rIns="0" bIns="0" rtlCol="0" anchor="ctr"/>
+          <a:lstStyle/>
+          <a:p>
+            <a:pPr marL="0" indent="0" algn="ctr">
+              <a:buNone/>
+            </a:pPr>
+            <a:r>
+              <a:rPr lang="en-US" sz="2000" b="1" dirty="0">
+                <a:solidFill>
+                  <a:srgbClr val="EF4444"/>
+                </a:solidFill>
+              </a:rPr>
+              <a:t>项目报价：新台幣 420,000 元</a:t>
+            </a:r>
+            <a:endParaRPr lang="en-US" sz="2000" dirty="0"/>
+          </a:p>
+        </p:txBody>
+      </p:sp>
+      <p:sp>
+        <p:nvSpPr>
+          <p:cNvPr id="6" name="Shape 4"/>
+          <p:cNvSpPr/>
+          <p:nvPr/>
+        </p:nvSpPr>
+        <p:spPr>
+          <a:xfrm>
+            <a:off x="3200400" y="2331720"/>
+            <a:ext cx="2743200" cy="36576"/>
+          </a:xfrm>
+          <a:prstGeom prst="rect">
+            <a:avLst/>
+          </a:prstGeom>
+          <a:solidFill>
+            <a:srgbClr val="334155"/>
+          </a:solidFill>
+          <a:ln w="12700">
+            <a:solidFill>
+              <a:srgbClr val="334155"/>
+            </a:solidFill>
+            <a:prstDash val="solid"/>
+          </a:ln>
+        </p:spPr>
+        <p:txBody>
+          <a:bodyPr/>
+          <a:lstStyle/>
+          <a:p>
+            <a:endParaRPr lang="zh-CN" altLang="en-US"/>
+          </a:p>
+        </p:txBody>
+      </p:sp>
+      <p:sp>
+        <p:nvSpPr>
+          <p:cNvPr id="7" name="Text 5"/>
+          <p:cNvSpPr/>
+          <p:nvPr/>
+        </p:nvSpPr>
+        <p:spPr>
+          <a:xfrm>
+            <a:off x="640080" y="2514600"/>
+            <a:ext cx="7863840" cy="320040"/>
+          </a:xfrm>
+          <a:prstGeom prst="rect">
+            <a:avLst/>
+          </a:prstGeom>
+          <a:noFill/>
+          <a:ln/>
+        </p:spPr>
+        <p:txBody>
+          <a:bodyPr wrap="square" lIns="0" tIns="0" rIns="0" bIns="0" rtlCol="0" anchor="ctr"/>
+          <a:lstStyle/>
+          <a:p>
+            <a:pPr marL="0" indent="0" algn="ctr">
+              <a:buNone/>
+            </a:pPr>
+            <a:r>
+              <a:rPr lang="en-US" sz="1200" dirty="0">
+                <a:solidFill>
+                  <a:srgbClr val="94A3B8"/>
+                </a:solidFill>
+              </a:rPr>
+              <a:t>工期：2 週（加班推进）</a:t>
+            </a:r>
+            <a:endParaRPr lang="en-US" sz="1200" dirty="0"/>
+          </a:p>
+        </p:txBody>
+      </p:sp>
+      <p:sp>
+        <p:nvSpPr>
+          <p:cNvPr id="8" name="Text 6"/>
+          <p:cNvSpPr/>
+          <p:nvPr/>
+        </p:nvSpPr>
+        <p:spPr>
+          <a:xfrm>
+            <a:off x="640080" y="2880360"/>
+            <a:ext cx="7863840" cy="320040"/>
+          </a:xfrm>
+          <a:prstGeom prst="rect">
+            <a:avLst/>
+          </a:prstGeom>
+          <a:noFill/>
+          <a:ln/>
+        </p:spPr>
+        <p:txBody>
+          <a:bodyPr wrap="square" lIns="0" tIns="0" rIns="0" bIns="0" rtlCol="0" anchor="ctr"/>
+          <a:lstStyle/>
+          <a:p>
+            <a:pPr marL="0" indent="0" algn="ctr">
+              <a:buNone/>
+            </a:pPr>
+            <a:r>
+              <a:rPr lang="en-US" sz="1200" dirty="0">
+                <a:solidFill>
+                  <a:srgbClr val="94A3B8"/>
+                </a:solidFill>
+              </a:rPr>
+              <a:t>人力：3–4 人（AI 工程师 + 後端 + 全站）</a:t>
+            </a:r>
+            <a:endParaRPr lang="en-US" sz="1200" dirty="0"/>
+          </a:p>
+        </p:txBody>
+      </p:sp>
+      <p:sp>
+        <p:nvSpPr>
+          <p:cNvPr id="9" name="Shape 7"/>
+          <p:cNvSpPr/>
+          <p:nvPr/>
+        </p:nvSpPr>
+        <p:spPr>
+          <a:xfrm>
+            <a:off x="3200400" y="3337560"/>
+            <a:ext cx="2743200" cy="36576"/>
+          </a:xfrm>
+          <a:prstGeom prst="rect">
+            <a:avLst/>
+          </a:prstGeom>
+          <a:solidFill>
+            <a:srgbClr val="334155"/>
+          </a:solidFill>
+          <a:ln w="12700">
+            <a:solidFill>
+              <a:srgbClr val="334155"/>
+            </a:solidFill>
+            <a:prstDash val="solid"/>
+          </a:ln>
+        </p:spPr>
+        <p:txBody>
+          <a:bodyPr/>
+          <a:lstStyle/>
+          <a:p>
+            <a:endParaRPr lang="zh-CN" altLang="en-US"/>
+          </a:p>
+        </p:txBody>
+      </p:sp>
+      <p:sp>
+        <p:nvSpPr>
+          <p:cNvPr id="10" name="Text 8"/>
+          <p:cNvSpPr/>
+          <p:nvPr/>
+        </p:nvSpPr>
+        <p:spPr>
+          <a:xfrm>
+            <a:off x="640080" y="3520440"/>
+            <a:ext cx="7863840" cy="365760"/>
+          </a:xfrm>
+          <a:prstGeom prst="rect">
+            <a:avLst/>
+          </a:prstGeom>
+          <a:noFill/>
+          <a:ln/>
+        </p:spPr>
+        <p:txBody>
+          <a:bodyPr wrap="square" lIns="0" tIns="0" rIns="0" bIns="0" rtlCol="0" anchor="ctr"/>
+          <a:lstStyle/>
+          <a:p>
+            <a:pPr marL="0" indent="0" algn="ctr">
+              <a:buNone/>
+            </a:pPr>
+            <a:r>
+              <a:rPr lang="en-US" sz="1300" dirty="0">
+                <a:solidFill>
+                  <a:srgbClr val="F97316"/>
+                </a:solidFill>
+              </a:rPr>
+              <a:t>感谢您的关注</a:t>
+            </a:r>
+            <a:endParaRPr lang="en-US" sz="1300" dirty="0"/>
           </a:p>
         </p:txBody>
       </p:sp>
@@ -1797,6 +2721,7 @@
         <a:solidFill>
           <a:srgbClr val="0F172A"/>
         </a:solidFill>
+        <a:effectLst/>
       </p:bgPr>
     </p:bg>
     <p:spTree>
@@ -1837,6 +2762,13 @@
             <a:prstDash val="solid"/>
           </a:ln>
         </p:spPr>
+        <p:txBody>
+          <a:bodyPr/>
+          <a:lstStyle/>
+          <a:p>
+            <a:endParaRPr lang="zh-CN" altLang="en-US"/>
+          </a:p>
+        </p:txBody>
       </p:sp>
       <p:sp>
         <p:nvSpPr>
@@ -1859,11 +2791,11 @@
           <a:bodyPr wrap="square" lIns="0" tIns="0" rIns="0" bIns="0" rtlCol="0" anchor="ctr"/>
           <a:lstStyle/>
           <a:p>
-            <a:pPr indent="0" marL="0">
+            <a:pPr marL="0" indent="0">
               <a:buNone/>
             </a:pPr>
             <a:r>
-              <a:rPr lang="en-US" sz="900" b="1" spc="300" kern="0" dirty="0">
+              <a:rPr lang="en-US" sz="900" b="1" kern="0" spc="300" dirty="0">
                 <a:solidFill>
                   <a:srgbClr val="F97316"/>
                 </a:solidFill>
@@ -1895,7 +2827,7 @@
           <a:bodyPr wrap="square" lIns="0" tIns="0" rIns="0" bIns="0" rtlCol="0" anchor="ctr"/>
           <a:lstStyle/>
           <a:p>
-            <a:pPr indent="0" marL="0">
+            <a:pPr marL="0" indent="0">
               <a:buNone/>
             </a:pPr>
             <a:r>
@@ -1934,13 +2866,20 @@
             <a:prstDash val="solid"/>
           </a:ln>
           <a:effectLst>
-            <a:outerShdw sx="100000" sy="100000" kx="0" ky="0" algn="bl" rotWithShape="0" blurRad="101600" dist="38100" dir="8100000">
+            <a:outerShdw blurRad="101600" dist="38100" dir="8100000" algn="bl" rotWithShape="0">
               <a:srgbClr val="000000">
                 <a:alpha val="25000"/>
               </a:srgbClr>
             </a:outerShdw>
           </a:effectLst>
         </p:spPr>
+        <p:txBody>
+          <a:bodyPr/>
+          <a:lstStyle/>
+          <a:p>
+            <a:endParaRPr lang="zh-CN" altLang="en-US"/>
+          </a:p>
+        </p:txBody>
       </p:sp>
       <p:sp>
         <p:nvSpPr>
@@ -1963,7 +2902,7 @@
           <a:bodyPr wrap="square" lIns="0" tIns="0" rIns="0" bIns="0" rtlCol="0" anchor="ctr"/>
           <a:lstStyle/>
           <a:p>
-            <a:pPr algn="ctr" indent="0" marL="0">
+            <a:pPr marL="0" indent="0" algn="ctr">
               <a:buNone/>
             </a:pPr>
             <a:r>
@@ -1999,7 +2938,7 @@
           <a:bodyPr wrap="square" lIns="0" tIns="0" rIns="0" bIns="0" rtlCol="0" anchor="ctr"/>
           <a:lstStyle/>
           <a:p>
-            <a:pPr algn="ctr" indent="0" marL="0">
+            <a:pPr marL="0" indent="0" algn="ctr">
               <a:buNone/>
             </a:pPr>
             <a:r>
@@ -2038,13 +2977,20 @@
             <a:prstDash val="solid"/>
           </a:ln>
           <a:effectLst>
-            <a:outerShdw sx="100000" sy="100000" kx="0" ky="0" algn="bl" rotWithShape="0" blurRad="101600" dist="38100" dir="8100000">
+            <a:outerShdw blurRad="101600" dist="38100" dir="8100000" algn="bl" rotWithShape="0">
               <a:srgbClr val="000000">
                 <a:alpha val="25000"/>
               </a:srgbClr>
             </a:outerShdw>
           </a:effectLst>
         </p:spPr>
+        <p:txBody>
+          <a:bodyPr/>
+          <a:lstStyle/>
+          <a:p>
+            <a:endParaRPr lang="zh-CN" altLang="en-US"/>
+          </a:p>
+        </p:txBody>
       </p:sp>
       <p:sp>
         <p:nvSpPr>
@@ -2067,7 +3013,7 @@
           <a:bodyPr wrap="square" lIns="0" tIns="0" rIns="0" bIns="0" rtlCol="0" anchor="ctr"/>
           <a:lstStyle/>
           <a:p>
-            <a:pPr algn="ctr" indent="0" marL="0">
+            <a:pPr marL="0" indent="0" algn="ctr">
               <a:buNone/>
             </a:pPr>
             <a:r>
@@ -2103,7 +3049,7 @@
           <a:bodyPr wrap="square" lIns="0" tIns="0" rIns="0" bIns="0" rtlCol="0" anchor="ctr"/>
           <a:lstStyle/>
           <a:p>
-            <a:pPr algn="ctr" indent="0" marL="0">
+            <a:pPr marL="0" indent="0" algn="ctr">
               <a:buNone/>
             </a:pPr>
             <a:r>
@@ -2142,13 +3088,20 @@
             <a:prstDash val="solid"/>
           </a:ln>
           <a:effectLst>
-            <a:outerShdw sx="100000" sy="100000" kx="0" ky="0" algn="bl" rotWithShape="0" blurRad="101600" dist="38100" dir="8100000">
+            <a:outerShdw blurRad="101600" dist="38100" dir="8100000" algn="bl" rotWithShape="0">
               <a:srgbClr val="000000">
                 <a:alpha val="25000"/>
               </a:srgbClr>
             </a:outerShdw>
           </a:effectLst>
         </p:spPr>
+        <p:txBody>
+          <a:bodyPr/>
+          <a:lstStyle/>
+          <a:p>
+            <a:endParaRPr lang="zh-CN" altLang="en-US"/>
+          </a:p>
+        </p:txBody>
       </p:sp>
       <p:sp>
         <p:nvSpPr>
@@ -2171,7 +3124,7 @@
           <a:bodyPr wrap="square" lIns="0" tIns="0" rIns="0" bIns="0" rtlCol="0" anchor="ctr"/>
           <a:lstStyle/>
           <a:p>
-            <a:pPr algn="ctr" indent="0" marL="0">
+            <a:pPr marL="0" indent="0" algn="ctr">
               <a:buNone/>
             </a:pPr>
             <a:r>
@@ -2207,7 +3160,7 @@
           <a:bodyPr wrap="square" lIns="0" tIns="0" rIns="0" bIns="0" rtlCol="0" anchor="ctr"/>
           <a:lstStyle/>
           <a:p>
-            <a:pPr algn="ctr" indent="0" marL="0">
+            <a:pPr marL="0" indent="0" algn="ctr">
               <a:buNone/>
             </a:pPr>
             <a:r>
@@ -2246,13 +3199,20 @@
             <a:prstDash val="solid"/>
           </a:ln>
           <a:effectLst>
-            <a:outerShdw sx="100000" sy="100000" kx="0" ky="0" algn="bl" rotWithShape="0" blurRad="101600" dist="38100" dir="8100000">
+            <a:outerShdw blurRad="101600" dist="38100" dir="8100000" algn="bl" rotWithShape="0">
               <a:srgbClr val="000000">
                 <a:alpha val="25000"/>
               </a:srgbClr>
             </a:outerShdw>
           </a:effectLst>
         </p:spPr>
+        <p:txBody>
+          <a:bodyPr/>
+          <a:lstStyle/>
+          <a:p>
+            <a:endParaRPr lang="zh-CN" altLang="en-US"/>
+          </a:p>
+        </p:txBody>
       </p:sp>
       <p:sp>
         <p:nvSpPr>
@@ -2275,7 +3235,7 @@
           <a:bodyPr wrap="square" lIns="0" tIns="0" rIns="0" bIns="0" rtlCol="0" anchor="ctr"/>
           <a:lstStyle/>
           <a:p>
-            <a:pPr algn="ctr" indent="0" marL="0">
+            <a:pPr marL="0" indent="0" algn="ctr">
               <a:buNone/>
             </a:pPr>
             <a:r>
@@ -2311,7 +3271,7 @@
           <a:bodyPr wrap="square" lIns="0" tIns="0" rIns="0" bIns="0" rtlCol="0" anchor="ctr"/>
           <a:lstStyle/>
           <a:p>
-            <a:pPr algn="ctr" indent="0" marL="0">
+            <a:pPr marL="0" indent="0" algn="ctr">
               <a:buNone/>
             </a:pPr>
             <a:r>
@@ -2350,13 +3310,20 @@
             <a:prstDash val="solid"/>
           </a:ln>
           <a:effectLst>
-            <a:outerShdw sx="100000" sy="100000" kx="0" ky="0" algn="bl" rotWithShape="0" blurRad="101600" dist="38100" dir="8100000">
+            <a:outerShdw blurRad="101600" dist="38100" dir="8100000" algn="bl" rotWithShape="0">
               <a:srgbClr val="000000">
                 <a:alpha val="25000"/>
               </a:srgbClr>
             </a:outerShdw>
           </a:effectLst>
         </p:spPr>
+        <p:txBody>
+          <a:bodyPr/>
+          <a:lstStyle/>
+          <a:p>
+            <a:endParaRPr lang="zh-CN" altLang="en-US"/>
+          </a:p>
+        </p:txBody>
       </p:sp>
       <p:sp>
         <p:nvSpPr>
@@ -2379,7 +3346,7 @@
           <a:bodyPr wrap="square" lIns="0" tIns="0" rIns="0" bIns="0" rtlCol="0" anchor="ctr"/>
           <a:lstStyle/>
           <a:p>
-            <a:pPr algn="ctr" indent="0" marL="0">
+            <a:pPr marL="0" indent="0" algn="ctr">
               <a:buNone/>
             </a:pPr>
             <a:r>
@@ -2415,7 +3382,7 @@
           <a:bodyPr wrap="square" lIns="0" tIns="0" rIns="0" bIns="0" rtlCol="0" anchor="ctr"/>
           <a:lstStyle/>
           <a:p>
-            <a:pPr algn="ctr" indent="0" marL="0">
+            <a:pPr marL="0" indent="0" algn="ctr">
               <a:buNone/>
             </a:pPr>
             <a:r>
@@ -2454,13 +3421,20 @@
             <a:prstDash val="solid"/>
           </a:ln>
           <a:effectLst>
-            <a:outerShdw sx="100000" sy="100000" kx="0" ky="0" algn="bl" rotWithShape="0" blurRad="101600" dist="38100" dir="8100000">
+            <a:outerShdw blurRad="101600" dist="38100" dir="8100000" algn="bl" rotWithShape="0">
               <a:srgbClr val="000000">
                 <a:alpha val="25000"/>
               </a:srgbClr>
             </a:outerShdw>
           </a:effectLst>
         </p:spPr>
+        <p:txBody>
+          <a:bodyPr/>
+          <a:lstStyle/>
+          <a:p>
+            <a:endParaRPr lang="zh-CN" altLang="en-US"/>
+          </a:p>
+        </p:txBody>
       </p:sp>
       <p:sp>
         <p:nvSpPr>
@@ -2483,7 +3457,7 @@
           <a:bodyPr wrap="square" lIns="0" tIns="0" rIns="0" bIns="0" rtlCol="0" anchor="ctr"/>
           <a:lstStyle/>
           <a:p>
-            <a:pPr algn="ctr" indent="0" marL="0">
+            <a:pPr marL="0" indent="0" algn="ctr">
               <a:buNone/>
             </a:pPr>
             <a:r>
@@ -2519,7 +3493,7 @@
           <a:bodyPr wrap="square" lIns="0" tIns="0" rIns="0" bIns="0" rtlCol="0" anchor="ctr"/>
           <a:lstStyle/>
           <a:p>
-            <a:pPr algn="ctr" indent="0" marL="0">
+            <a:pPr marL="0" indent="0" algn="ctr">
               <a:buNone/>
             </a:pPr>
             <a:r>
@@ -2555,7 +3529,7 @@
           <a:bodyPr wrap="square" lIns="0" tIns="0" rIns="0" bIns="0" rtlCol="0" anchor="ctr"/>
           <a:lstStyle/>
           <a:p>
-            <a:pPr algn="ctr" indent="0" marL="0">
+            <a:pPr marL="0" indent="0" algn="ctr">
               <a:buNone/>
             </a:pPr>
             <a:r>
@@ -2586,6 +3560,7 @@
         <a:solidFill>
           <a:srgbClr val="0F172A"/>
         </a:solidFill>
+        <a:effectLst/>
       </p:bgPr>
     </p:bg>
     <p:spTree>
@@ -2626,6 +3601,13 @@
             <a:prstDash val="solid"/>
           </a:ln>
         </p:spPr>
+        <p:txBody>
+          <a:bodyPr/>
+          <a:lstStyle/>
+          <a:p>
+            <a:endParaRPr lang="zh-CN" altLang="en-US"/>
+          </a:p>
+        </p:txBody>
       </p:sp>
       <p:sp>
         <p:nvSpPr>
@@ -2648,11 +3630,11 @@
           <a:bodyPr wrap="square" lIns="0" tIns="0" rIns="0" bIns="0" rtlCol="0" anchor="ctr"/>
           <a:lstStyle/>
           <a:p>
-            <a:pPr indent="0" marL="0">
+            <a:pPr marL="0" indent="0">
               <a:buNone/>
             </a:pPr>
             <a:r>
-              <a:rPr lang="en-US" sz="900" b="1" spc="300" kern="0" dirty="0">
+              <a:rPr lang="en-US" sz="900" b="1" kern="0" spc="300" dirty="0">
                 <a:solidFill>
                   <a:srgbClr val="F97316"/>
                 </a:solidFill>
@@ -2684,7 +3666,7 @@
           <a:bodyPr wrap="square" lIns="0" tIns="0" rIns="0" bIns="0" rtlCol="0" anchor="ctr"/>
           <a:lstStyle/>
           <a:p>
-            <a:pPr indent="0" marL="0">
+            <a:pPr marL="0" indent="0">
               <a:buNone/>
             </a:pPr>
             <a:r>
@@ -2723,13 +3705,20 @@
             <a:prstDash val="solid"/>
           </a:ln>
           <a:effectLst>
-            <a:outerShdw sx="100000" sy="100000" kx="0" ky="0" algn="bl" rotWithShape="0" blurRad="101600" dist="38100" dir="8100000">
+            <a:outerShdw blurRad="101600" dist="38100" dir="8100000" algn="bl" rotWithShape="0">
               <a:srgbClr val="000000">
                 <a:alpha val="25000"/>
               </a:srgbClr>
             </a:outerShdw>
           </a:effectLst>
         </p:spPr>
+        <p:txBody>
+          <a:bodyPr/>
+          <a:lstStyle/>
+          <a:p>
+            <a:endParaRPr lang="zh-CN" altLang="en-US"/>
+          </a:p>
+        </p:txBody>
       </p:sp>
       <p:sp>
         <p:nvSpPr>
@@ -2755,6 +3744,13 @@
             <a:prstDash val="solid"/>
           </a:ln>
         </p:spPr>
+        <p:txBody>
+          <a:bodyPr/>
+          <a:lstStyle/>
+          <a:p>
+            <a:endParaRPr lang="zh-CN" altLang="en-US"/>
+          </a:p>
+        </p:txBody>
       </p:sp>
       <p:sp>
         <p:nvSpPr>
@@ -2777,7 +3773,7 @@
           <a:bodyPr wrap="square" lIns="0" tIns="0" rIns="0" bIns="0" rtlCol="0" anchor="ctr"/>
           <a:lstStyle/>
           <a:p>
-            <a:pPr indent="0" marL="0">
+            <a:pPr marL="0" indent="0">
               <a:buNone/>
             </a:pPr>
             <a:r>
@@ -2943,13 +3939,20 @@
             <a:prstDash val="solid"/>
           </a:ln>
           <a:effectLst>
-            <a:outerShdw sx="100000" sy="100000" kx="0" ky="0" algn="bl" rotWithShape="0" blurRad="101600" dist="38100" dir="8100000">
+            <a:outerShdw blurRad="101600" dist="38100" dir="8100000" algn="bl" rotWithShape="0">
               <a:srgbClr val="000000">
                 <a:alpha val="25000"/>
               </a:srgbClr>
             </a:outerShdw>
           </a:effectLst>
         </p:spPr>
+        <p:txBody>
+          <a:bodyPr/>
+          <a:lstStyle/>
+          <a:p>
+            <a:endParaRPr lang="zh-CN" altLang="en-US"/>
+          </a:p>
+        </p:txBody>
       </p:sp>
       <p:sp>
         <p:nvSpPr>
@@ -2975,6 +3978,13 @@
             <a:prstDash val="solid"/>
           </a:ln>
         </p:spPr>
+        <p:txBody>
+          <a:bodyPr/>
+          <a:lstStyle/>
+          <a:p>
+            <a:endParaRPr lang="zh-CN" altLang="en-US"/>
+          </a:p>
+        </p:txBody>
       </p:sp>
       <p:sp>
         <p:nvSpPr>
@@ -2997,7 +4007,7 @@
           <a:bodyPr wrap="square" lIns="0" tIns="0" rIns="0" bIns="0" rtlCol="0" anchor="ctr"/>
           <a:lstStyle/>
           <a:p>
-            <a:pPr indent="0" marL="0">
+            <a:pPr marL="0" indent="0">
               <a:buNone/>
             </a:pPr>
             <a:r>
@@ -3155,6 +4165,7 @@
         <a:solidFill>
           <a:srgbClr val="0F172A"/>
         </a:solidFill>
+        <a:effectLst/>
       </p:bgPr>
     </p:bg>
     <p:spTree>
@@ -3195,6 +4206,13 @@
             <a:prstDash val="solid"/>
           </a:ln>
         </p:spPr>
+        <p:txBody>
+          <a:bodyPr/>
+          <a:lstStyle/>
+          <a:p>
+            <a:endParaRPr lang="zh-CN" altLang="en-US"/>
+          </a:p>
+        </p:txBody>
       </p:sp>
       <p:sp>
         <p:nvSpPr>
@@ -3217,11 +4235,11 @@
           <a:bodyPr wrap="square" lIns="0" tIns="0" rIns="0" bIns="0" rtlCol="0" anchor="ctr"/>
           <a:lstStyle/>
           <a:p>
-            <a:pPr indent="0" marL="0">
+            <a:pPr marL="0" indent="0">
               <a:buNone/>
             </a:pPr>
             <a:r>
-              <a:rPr lang="en-US" sz="900" b="1" spc="300" kern="0" dirty="0">
+              <a:rPr lang="en-US" sz="900" b="1" kern="0" spc="300" dirty="0">
                 <a:solidFill>
                   <a:srgbClr val="F97316"/>
                 </a:solidFill>
@@ -3253,7 +4271,7 @@
           <a:bodyPr wrap="square" lIns="0" tIns="0" rIns="0" bIns="0" rtlCol="0" anchor="ctr"/>
           <a:lstStyle/>
           <a:p>
-            <a:pPr indent="0" marL="0">
+            <a:pPr marL="0" indent="0">
               <a:buNone/>
             </a:pPr>
             <a:r>
@@ -3292,13 +4310,20 @@
             <a:prstDash val="solid"/>
           </a:ln>
           <a:effectLst>
-            <a:outerShdw sx="100000" sy="100000" kx="0" ky="0" algn="bl" rotWithShape="0" blurRad="101600" dist="38100" dir="8100000">
+            <a:outerShdw blurRad="101600" dist="38100" dir="8100000" algn="bl" rotWithShape="0">
               <a:srgbClr val="000000">
                 <a:alpha val="25000"/>
               </a:srgbClr>
             </a:outerShdw>
           </a:effectLst>
         </p:spPr>
+        <p:txBody>
+          <a:bodyPr/>
+          <a:lstStyle/>
+          <a:p>
+            <a:endParaRPr lang="zh-CN" altLang="en-US"/>
+          </a:p>
+        </p:txBody>
       </p:sp>
       <p:sp>
         <p:nvSpPr>
@@ -3324,6 +4349,13 @@
             <a:prstDash val="solid"/>
           </a:ln>
         </p:spPr>
+        <p:txBody>
+          <a:bodyPr/>
+          <a:lstStyle/>
+          <a:p>
+            <a:endParaRPr lang="zh-CN" altLang="en-US"/>
+          </a:p>
+        </p:txBody>
       </p:sp>
       <p:sp>
         <p:nvSpPr>
@@ -3346,7 +4378,7 @@
           <a:bodyPr wrap="square" lIns="0" tIns="0" rIns="0" bIns="0" rtlCol="0" anchor="ctr"/>
           <a:lstStyle/>
           <a:p>
-            <a:pPr indent="0" marL="0">
+            <a:pPr marL="0" indent="0">
               <a:buNone/>
             </a:pPr>
             <a:r>
@@ -3512,13 +4544,20 @@
             <a:prstDash val="solid"/>
           </a:ln>
           <a:effectLst>
-            <a:outerShdw sx="100000" sy="100000" kx="0" ky="0" algn="bl" rotWithShape="0" blurRad="101600" dist="38100" dir="8100000">
+            <a:outerShdw blurRad="101600" dist="38100" dir="8100000" algn="bl" rotWithShape="0">
               <a:srgbClr val="000000">
                 <a:alpha val="25000"/>
               </a:srgbClr>
             </a:outerShdw>
           </a:effectLst>
         </p:spPr>
+        <p:txBody>
+          <a:bodyPr/>
+          <a:lstStyle/>
+          <a:p>
+            <a:endParaRPr lang="zh-CN" altLang="en-US"/>
+          </a:p>
+        </p:txBody>
       </p:sp>
       <p:sp>
         <p:nvSpPr>
@@ -3544,6 +4583,13 @@
             <a:prstDash val="solid"/>
           </a:ln>
         </p:spPr>
+        <p:txBody>
+          <a:bodyPr/>
+          <a:lstStyle/>
+          <a:p>
+            <a:endParaRPr lang="zh-CN" altLang="en-US"/>
+          </a:p>
+        </p:txBody>
       </p:sp>
       <p:sp>
         <p:nvSpPr>
@@ -3566,7 +4612,7 @@
           <a:bodyPr wrap="square" lIns="0" tIns="0" rIns="0" bIns="0" rtlCol="0" anchor="ctr"/>
           <a:lstStyle/>
           <a:p>
-            <a:pPr indent="0" marL="0">
+            <a:pPr marL="0" indent="0">
               <a:buNone/>
             </a:pPr>
             <a:r>
@@ -3724,6 +4770,7 @@
         <a:solidFill>
           <a:srgbClr val="0F172A"/>
         </a:solidFill>
+        <a:effectLst/>
       </p:bgPr>
     </p:bg>
     <p:spTree>
@@ -3764,6 +4811,13 @@
             <a:prstDash val="solid"/>
           </a:ln>
         </p:spPr>
+        <p:txBody>
+          <a:bodyPr/>
+          <a:lstStyle/>
+          <a:p>
+            <a:endParaRPr lang="zh-CN" altLang="en-US"/>
+          </a:p>
+        </p:txBody>
       </p:sp>
       <p:sp>
         <p:nvSpPr>
@@ -3786,11 +4840,11 @@
           <a:bodyPr wrap="square" lIns="0" tIns="0" rIns="0" bIns="0" rtlCol="0" anchor="ctr"/>
           <a:lstStyle/>
           <a:p>
-            <a:pPr indent="0" marL="0">
+            <a:pPr marL="0" indent="0">
               <a:buNone/>
             </a:pPr>
             <a:r>
-              <a:rPr lang="en-US" sz="900" b="1" spc="300" kern="0" dirty="0">
+              <a:rPr lang="en-US" sz="900" b="1" kern="0" spc="300" dirty="0">
                 <a:solidFill>
                   <a:srgbClr val="F97316"/>
                 </a:solidFill>
@@ -3822,7 +4876,7 @@
           <a:bodyPr wrap="square" lIns="0" tIns="0" rIns="0" bIns="0" rtlCol="0" anchor="ctr"/>
           <a:lstStyle/>
           <a:p>
-            <a:pPr indent="0" marL="0">
+            <a:pPr marL="0" indent="0">
               <a:buNone/>
             </a:pPr>
             <a:r>
@@ -3861,13 +4915,20 @@
             <a:prstDash val="solid"/>
           </a:ln>
           <a:effectLst>
-            <a:outerShdw sx="100000" sy="100000" kx="0" ky="0" algn="bl" rotWithShape="0" blurRad="101600" dist="38100" dir="8100000">
+            <a:outerShdw blurRad="101600" dist="38100" dir="8100000" algn="bl" rotWithShape="0">
               <a:srgbClr val="000000">
                 <a:alpha val="25000"/>
               </a:srgbClr>
             </a:outerShdw>
           </a:effectLst>
         </p:spPr>
+        <p:txBody>
+          <a:bodyPr/>
+          <a:lstStyle/>
+          <a:p>
+            <a:endParaRPr lang="zh-CN" altLang="en-US"/>
+          </a:p>
+        </p:txBody>
       </p:sp>
       <p:sp>
         <p:nvSpPr>
@@ -3893,6 +4954,13 @@
             <a:prstDash val="solid"/>
           </a:ln>
         </p:spPr>
+        <p:txBody>
+          <a:bodyPr/>
+          <a:lstStyle/>
+          <a:p>
+            <a:endParaRPr lang="zh-CN" altLang="en-US"/>
+          </a:p>
+        </p:txBody>
       </p:sp>
       <p:sp>
         <p:nvSpPr>
@@ -3915,7 +4983,7 @@
           <a:bodyPr wrap="square" lIns="0" tIns="0" rIns="0" bIns="0" rtlCol="0" anchor="ctr"/>
           <a:lstStyle/>
           <a:p>
-            <a:pPr indent="0" marL="0">
+            <a:pPr marL="0" indent="0">
               <a:buNone/>
             </a:pPr>
             <a:r>
@@ -4081,13 +5149,20 @@
             <a:prstDash val="solid"/>
           </a:ln>
           <a:effectLst>
-            <a:outerShdw sx="100000" sy="100000" kx="0" ky="0" algn="bl" rotWithShape="0" blurRad="101600" dist="38100" dir="8100000">
+            <a:outerShdw blurRad="101600" dist="38100" dir="8100000" algn="bl" rotWithShape="0">
               <a:srgbClr val="000000">
                 <a:alpha val="25000"/>
               </a:srgbClr>
             </a:outerShdw>
           </a:effectLst>
         </p:spPr>
+        <p:txBody>
+          <a:bodyPr/>
+          <a:lstStyle/>
+          <a:p>
+            <a:endParaRPr lang="zh-CN" altLang="en-US"/>
+          </a:p>
+        </p:txBody>
       </p:sp>
       <p:sp>
         <p:nvSpPr>
@@ -4113,6 +5188,13 @@
             <a:prstDash val="solid"/>
           </a:ln>
         </p:spPr>
+        <p:txBody>
+          <a:bodyPr/>
+          <a:lstStyle/>
+          <a:p>
+            <a:endParaRPr lang="zh-CN" altLang="en-US"/>
+          </a:p>
+        </p:txBody>
       </p:sp>
       <p:sp>
         <p:nvSpPr>
@@ -4135,7 +5217,7 @@
           <a:bodyPr wrap="square" lIns="0" tIns="0" rIns="0" bIns="0" rtlCol="0" anchor="ctr"/>
           <a:lstStyle/>
           <a:p>
-            <a:pPr indent="0" marL="0">
+            <a:pPr marL="0" indent="0">
               <a:buNone/>
             </a:pPr>
             <a:r>
@@ -4293,6 +5375,7 @@
         <a:solidFill>
           <a:srgbClr val="0F172A"/>
         </a:solidFill>
+        <a:effectLst/>
       </p:bgPr>
     </p:bg>
     <p:spTree>
@@ -4333,6 +5416,13 @@
             <a:prstDash val="solid"/>
           </a:ln>
         </p:spPr>
+        <p:txBody>
+          <a:bodyPr/>
+          <a:lstStyle/>
+          <a:p>
+            <a:endParaRPr lang="zh-CN" altLang="en-US"/>
+          </a:p>
+        </p:txBody>
       </p:sp>
       <p:sp>
         <p:nvSpPr>
@@ -4355,11 +5445,11 @@
           <a:bodyPr wrap="square" lIns="0" tIns="0" rIns="0" bIns="0" rtlCol="0" anchor="ctr"/>
           <a:lstStyle/>
           <a:p>
-            <a:pPr indent="0" marL="0">
+            <a:pPr marL="0" indent="0">
               <a:buNone/>
             </a:pPr>
             <a:r>
-              <a:rPr lang="en-US" sz="900" b="1" spc="300" kern="0" dirty="0">
+              <a:rPr lang="en-US" sz="900" b="1" kern="0" spc="300" dirty="0">
                 <a:solidFill>
                   <a:srgbClr val="F97316"/>
                 </a:solidFill>
@@ -4391,7 +5481,7 @@
           <a:bodyPr wrap="square" lIns="0" tIns="0" rIns="0" bIns="0" rtlCol="0" anchor="ctr"/>
           <a:lstStyle/>
           <a:p>
-            <a:pPr indent="0" marL="0">
+            <a:pPr marL="0" indent="0">
               <a:buNone/>
             </a:pPr>
             <a:r>
@@ -4430,13 +5520,20 @@
             <a:prstDash val="solid"/>
           </a:ln>
           <a:effectLst>
-            <a:outerShdw sx="100000" sy="100000" kx="0" ky="0" algn="bl" rotWithShape="0" blurRad="101600" dist="38100" dir="8100000">
+            <a:outerShdw blurRad="101600" dist="38100" dir="8100000" algn="bl" rotWithShape="0">
               <a:srgbClr val="000000">
                 <a:alpha val="25000"/>
               </a:srgbClr>
             </a:outerShdw>
           </a:effectLst>
         </p:spPr>
+        <p:txBody>
+          <a:bodyPr/>
+          <a:lstStyle/>
+          <a:p>
+            <a:endParaRPr lang="zh-CN" altLang="en-US"/>
+          </a:p>
+        </p:txBody>
       </p:sp>
       <p:sp>
         <p:nvSpPr>
@@ -4462,6 +5559,13 @@
             <a:prstDash val="solid"/>
           </a:ln>
         </p:spPr>
+        <p:txBody>
+          <a:bodyPr/>
+          <a:lstStyle/>
+          <a:p>
+            <a:endParaRPr lang="zh-CN" altLang="en-US"/>
+          </a:p>
+        </p:txBody>
       </p:sp>
       <p:sp>
         <p:nvSpPr>
@@ -4484,7 +5588,7 @@
           <a:bodyPr wrap="square" lIns="0" tIns="0" rIns="0" bIns="0" rtlCol="0" anchor="ctr"/>
           <a:lstStyle/>
           <a:p>
-            <a:pPr indent="0" marL="0">
+            <a:pPr marL="0" indent="0">
               <a:buNone/>
             </a:pPr>
             <a:r>
@@ -4520,7 +5624,7 @@
           <a:bodyPr wrap="square" lIns="0" tIns="0" rIns="0" bIns="0" rtlCol="0" anchor="ctr"/>
           <a:lstStyle/>
           <a:p>
-            <a:pPr indent="0" marL="0">
+            <a:pPr marL="0" indent="0">
               <a:buNone/>
             </a:pPr>
             <a:r>
@@ -4559,13 +5663,20 @@
             <a:prstDash val="solid"/>
           </a:ln>
           <a:effectLst>
-            <a:outerShdw sx="100000" sy="100000" kx="0" ky="0" algn="bl" rotWithShape="0" blurRad="101600" dist="38100" dir="8100000">
+            <a:outerShdw blurRad="101600" dist="38100" dir="8100000" algn="bl" rotWithShape="0">
               <a:srgbClr val="000000">
                 <a:alpha val="25000"/>
               </a:srgbClr>
             </a:outerShdw>
           </a:effectLst>
         </p:spPr>
+        <p:txBody>
+          <a:bodyPr/>
+          <a:lstStyle/>
+          <a:p>
+            <a:endParaRPr lang="zh-CN" altLang="en-US"/>
+          </a:p>
+        </p:txBody>
       </p:sp>
       <p:sp>
         <p:nvSpPr>
@@ -4591,6 +5702,13 @@
             <a:prstDash val="solid"/>
           </a:ln>
         </p:spPr>
+        <p:txBody>
+          <a:bodyPr/>
+          <a:lstStyle/>
+          <a:p>
+            <a:endParaRPr lang="zh-CN" altLang="en-US"/>
+          </a:p>
+        </p:txBody>
       </p:sp>
       <p:sp>
         <p:nvSpPr>
@@ -4613,7 +5731,7 @@
           <a:bodyPr wrap="square" lIns="0" tIns="0" rIns="0" bIns="0" rtlCol="0" anchor="ctr"/>
           <a:lstStyle/>
           <a:p>
-            <a:pPr indent="0" marL="0">
+            <a:pPr marL="0" indent="0">
               <a:buNone/>
             </a:pPr>
             <a:r>
@@ -4649,7 +5767,7 @@
           <a:bodyPr wrap="square" lIns="0" tIns="0" rIns="0" bIns="0" rtlCol="0" anchor="ctr"/>
           <a:lstStyle/>
           <a:p>
-            <a:pPr indent="0" marL="0">
+            <a:pPr marL="0" indent="0">
               <a:buNone/>
             </a:pPr>
             <a:r>
@@ -4688,13 +5806,20 @@
             <a:prstDash val="solid"/>
           </a:ln>
           <a:effectLst>
-            <a:outerShdw sx="100000" sy="100000" kx="0" ky="0" algn="bl" rotWithShape="0" blurRad="101600" dist="38100" dir="8100000">
+            <a:outerShdw blurRad="101600" dist="38100" dir="8100000" algn="bl" rotWithShape="0">
               <a:srgbClr val="000000">
                 <a:alpha val="25000"/>
               </a:srgbClr>
             </a:outerShdw>
           </a:effectLst>
         </p:spPr>
+        <p:txBody>
+          <a:bodyPr/>
+          <a:lstStyle/>
+          <a:p>
+            <a:endParaRPr lang="zh-CN" altLang="en-US"/>
+          </a:p>
+        </p:txBody>
       </p:sp>
       <p:sp>
         <p:nvSpPr>
@@ -4720,6 +5845,13 @@
             <a:prstDash val="solid"/>
           </a:ln>
         </p:spPr>
+        <p:txBody>
+          <a:bodyPr/>
+          <a:lstStyle/>
+          <a:p>
+            <a:endParaRPr lang="zh-CN" altLang="en-US"/>
+          </a:p>
+        </p:txBody>
       </p:sp>
       <p:sp>
         <p:nvSpPr>
@@ -4742,7 +5874,7 @@
           <a:bodyPr wrap="square" lIns="0" tIns="0" rIns="0" bIns="0" rtlCol="0" anchor="ctr"/>
           <a:lstStyle/>
           <a:p>
-            <a:pPr indent="0" marL="0">
+            <a:pPr marL="0" indent="0">
               <a:buNone/>
             </a:pPr>
             <a:r>
@@ -4778,7 +5910,7 @@
           <a:bodyPr wrap="square" lIns="0" tIns="0" rIns="0" bIns="0" rtlCol="0" anchor="ctr"/>
           <a:lstStyle/>
           <a:p>
-            <a:pPr indent="0" marL="0">
+            <a:pPr marL="0" indent="0">
               <a:buNone/>
             </a:pPr>
             <a:r>
@@ -4817,13 +5949,20 @@
             <a:prstDash val="solid"/>
           </a:ln>
           <a:effectLst>
-            <a:outerShdw sx="100000" sy="100000" kx="0" ky="0" algn="bl" rotWithShape="0" blurRad="101600" dist="38100" dir="8100000">
+            <a:outerShdw blurRad="101600" dist="38100" dir="8100000" algn="bl" rotWithShape="0">
               <a:srgbClr val="000000">
                 <a:alpha val="25000"/>
               </a:srgbClr>
             </a:outerShdw>
           </a:effectLst>
         </p:spPr>
+        <p:txBody>
+          <a:bodyPr/>
+          <a:lstStyle/>
+          <a:p>
+            <a:endParaRPr lang="zh-CN" altLang="en-US"/>
+          </a:p>
+        </p:txBody>
       </p:sp>
       <p:sp>
         <p:nvSpPr>
@@ -4849,6 +5988,13 @@
             <a:prstDash val="solid"/>
           </a:ln>
         </p:spPr>
+        <p:txBody>
+          <a:bodyPr/>
+          <a:lstStyle/>
+          <a:p>
+            <a:endParaRPr lang="zh-CN" altLang="en-US"/>
+          </a:p>
+        </p:txBody>
       </p:sp>
       <p:sp>
         <p:nvSpPr>
@@ -4871,7 +6017,7 @@
           <a:bodyPr wrap="square" lIns="0" tIns="0" rIns="0" bIns="0" rtlCol="0" anchor="ctr"/>
           <a:lstStyle/>
           <a:p>
-            <a:pPr indent="0" marL="0">
+            <a:pPr marL="0" indent="0">
               <a:buNone/>
             </a:pPr>
             <a:r>
@@ -4907,7 +6053,7 @@
           <a:bodyPr wrap="square" lIns="0" tIns="0" rIns="0" bIns="0" rtlCol="0" anchor="ctr"/>
           <a:lstStyle/>
           <a:p>
-            <a:pPr indent="0" marL="0">
+            <a:pPr marL="0" indent="0">
               <a:buNone/>
             </a:pPr>
             <a:r>
@@ -4946,13 +6092,20 @@
             <a:prstDash val="solid"/>
           </a:ln>
           <a:effectLst>
-            <a:outerShdw sx="100000" sy="100000" kx="0" ky="0" algn="bl" rotWithShape="0" blurRad="101600" dist="38100" dir="8100000">
+            <a:outerShdw blurRad="101600" dist="38100" dir="8100000" algn="bl" rotWithShape="0">
               <a:srgbClr val="000000">
                 <a:alpha val="25000"/>
               </a:srgbClr>
             </a:outerShdw>
           </a:effectLst>
         </p:spPr>
+        <p:txBody>
+          <a:bodyPr/>
+          <a:lstStyle/>
+          <a:p>
+            <a:endParaRPr lang="zh-CN" altLang="en-US"/>
+          </a:p>
+        </p:txBody>
       </p:sp>
       <p:sp>
         <p:nvSpPr>
@@ -4978,6 +6131,13 @@
             <a:prstDash val="solid"/>
           </a:ln>
         </p:spPr>
+        <p:txBody>
+          <a:bodyPr/>
+          <a:lstStyle/>
+          <a:p>
+            <a:endParaRPr lang="zh-CN" altLang="en-US"/>
+          </a:p>
+        </p:txBody>
       </p:sp>
       <p:sp>
         <p:nvSpPr>
@@ -5000,7 +6160,7 @@
           <a:bodyPr wrap="square" lIns="0" tIns="0" rIns="0" bIns="0" rtlCol="0" anchor="ctr"/>
           <a:lstStyle/>
           <a:p>
-            <a:pPr indent="0" marL="0">
+            <a:pPr marL="0" indent="0">
               <a:buNone/>
             </a:pPr>
             <a:r>
@@ -5036,7 +6196,7 @@
           <a:bodyPr wrap="square" lIns="0" tIns="0" rIns="0" bIns="0" rtlCol="0" anchor="ctr"/>
           <a:lstStyle/>
           <a:p>
-            <a:pPr indent="0" marL="0">
+            <a:pPr marL="0" indent="0">
               <a:buNone/>
             </a:pPr>
             <a:r>
@@ -5067,6 +6227,7 @@
         <a:solidFill>
           <a:srgbClr val="0F172A"/>
         </a:solidFill>
+        <a:effectLst/>
       </p:bgPr>
     </p:bg>
     <p:spTree>
@@ -5107,6 +6268,13 @@
             <a:prstDash val="solid"/>
           </a:ln>
         </p:spPr>
+        <p:txBody>
+          <a:bodyPr/>
+          <a:lstStyle/>
+          <a:p>
+            <a:endParaRPr lang="zh-CN" altLang="en-US"/>
+          </a:p>
+        </p:txBody>
       </p:sp>
       <p:sp>
         <p:nvSpPr>
@@ -5129,11 +6297,11 @@
           <a:bodyPr wrap="square" lIns="0" tIns="0" rIns="0" bIns="0" rtlCol="0" anchor="ctr"/>
           <a:lstStyle/>
           <a:p>
-            <a:pPr indent="0" marL="0">
+            <a:pPr marL="0" indent="0">
               <a:buNone/>
             </a:pPr>
             <a:r>
-              <a:rPr lang="en-US" sz="900" b="1" spc="300" kern="0" dirty="0">
+              <a:rPr lang="en-US" sz="900" b="1" kern="0" spc="300" dirty="0">
                 <a:solidFill>
                   <a:srgbClr val="F97316"/>
                 </a:solidFill>
@@ -5165,7 +6333,7 @@
           <a:bodyPr wrap="square" lIns="0" tIns="0" rIns="0" bIns="0" rtlCol="0" anchor="ctr"/>
           <a:lstStyle/>
           <a:p>
-            <a:pPr indent="0" marL="0">
+            <a:pPr marL="0" indent="0">
               <a:buNone/>
             </a:pPr>
             <a:r>
@@ -5204,13 +6372,20 @@
             <a:prstDash val="solid"/>
           </a:ln>
           <a:effectLst>
-            <a:outerShdw sx="100000" sy="100000" kx="0" ky="0" algn="bl" rotWithShape="0" blurRad="101600" dist="38100" dir="8100000">
+            <a:outerShdw blurRad="101600" dist="38100" dir="8100000" algn="bl" rotWithShape="0">
               <a:srgbClr val="000000">
                 <a:alpha val="25000"/>
               </a:srgbClr>
             </a:outerShdw>
           </a:effectLst>
         </p:spPr>
+        <p:txBody>
+          <a:bodyPr/>
+          <a:lstStyle/>
+          <a:p>
+            <a:endParaRPr lang="zh-CN" altLang="en-US"/>
+          </a:p>
+        </p:txBody>
       </p:sp>
       <p:sp>
         <p:nvSpPr>
@@ -5236,6 +6411,13 @@
             <a:prstDash val="solid"/>
           </a:ln>
         </p:spPr>
+        <p:txBody>
+          <a:bodyPr/>
+          <a:lstStyle/>
+          <a:p>
+            <a:endParaRPr lang="zh-CN" altLang="en-US"/>
+          </a:p>
+        </p:txBody>
       </p:sp>
       <p:sp>
         <p:nvSpPr>
@@ -5258,7 +6440,7 @@
           <a:bodyPr wrap="square" lIns="0" tIns="0" rIns="0" bIns="0" rtlCol="0" anchor="ctr"/>
           <a:lstStyle/>
           <a:p>
-            <a:pPr indent="0" marL="0">
+            <a:pPr marL="0" indent="0">
               <a:buNone/>
             </a:pPr>
             <a:r>
@@ -5424,13 +6606,20 @@
             <a:prstDash val="solid"/>
           </a:ln>
           <a:effectLst>
-            <a:outerShdw sx="100000" sy="100000" kx="0" ky="0" algn="bl" rotWithShape="0" blurRad="101600" dist="38100" dir="8100000">
+            <a:outerShdw blurRad="101600" dist="38100" dir="8100000" algn="bl" rotWithShape="0">
               <a:srgbClr val="000000">
                 <a:alpha val="25000"/>
               </a:srgbClr>
             </a:outerShdw>
           </a:effectLst>
         </p:spPr>
+        <p:txBody>
+          <a:bodyPr/>
+          <a:lstStyle/>
+          <a:p>
+            <a:endParaRPr lang="zh-CN" altLang="en-US"/>
+          </a:p>
+        </p:txBody>
       </p:sp>
       <p:sp>
         <p:nvSpPr>
@@ -5456,6 +6645,13 @@
             <a:prstDash val="solid"/>
           </a:ln>
         </p:spPr>
+        <p:txBody>
+          <a:bodyPr/>
+          <a:lstStyle/>
+          <a:p>
+            <a:endParaRPr lang="zh-CN" altLang="en-US"/>
+          </a:p>
+        </p:txBody>
       </p:sp>
       <p:sp>
         <p:nvSpPr>
@@ -5478,7 +6674,7 @@
           <a:bodyPr wrap="square" lIns="0" tIns="0" rIns="0" bIns="0" rtlCol="0" anchor="ctr"/>
           <a:lstStyle/>
           <a:p>
-            <a:pPr indent="0" marL="0">
+            <a:pPr marL="0" indent="0">
               <a:buNone/>
             </a:pPr>
             <a:r>
@@ -5630,12 +6826,13 @@
 
 <file path=ppt/slides/slide8.xml><?xml version="1.0" encoding="utf-8"?>
 <p:sld xmlns:a="http://schemas.openxmlformats.org/drawingml/2006/main" xmlns:r="http://schemas.openxmlformats.org/officeDocument/2006/relationships" xmlns:p="http://schemas.openxmlformats.org/presentationml/2006/main">
-  <p:cSld name="Slide 8">
+  <p:cSld name="Slide 10">
     <p:bg>
       <p:bgPr>
         <a:solidFill>
           <a:srgbClr val="0F172A"/>
         </a:solidFill>
+        <a:effectLst/>
       </p:bgPr>
     </p:bg>
     <p:spTree>
@@ -5676,6 +6873,13 @@
             <a:prstDash val="solid"/>
           </a:ln>
         </p:spPr>
+        <p:txBody>
+          <a:bodyPr/>
+          <a:lstStyle/>
+          <a:p>
+            <a:endParaRPr lang="zh-CN" altLang="en-US"/>
+          </a:p>
+        </p:txBody>
       </p:sp>
       <p:sp>
         <p:nvSpPr>
@@ -5698,16 +6902,16 @@
           <a:bodyPr wrap="square" lIns="0" tIns="0" rIns="0" bIns="0" rtlCol="0" anchor="ctr"/>
           <a:lstStyle/>
           <a:p>
-            <a:pPr indent="0" marL="0">
+            <a:pPr marL="0" indent="0">
               <a:buNone/>
             </a:pPr>
             <a:r>
-              <a:rPr lang="en-US" sz="900" b="1" spc="300" kern="0" dirty="0">
+              <a:rPr lang="en-US" sz="900" b="1" kern="0" spc="300" dirty="0">
                 <a:solidFill>
                   <a:srgbClr val="F97316"/>
                 </a:solidFill>
               </a:rPr>
-              <a:t>STATUS</a:t>
+              <a:t>PRICING</a:t>
             </a:r>
             <a:endParaRPr lang="en-US" sz="900" dirty="0"/>
           </a:p>
@@ -5734,7 +6938,7 @@
           <a:bodyPr wrap="square" lIns="0" tIns="0" rIns="0" bIns="0" rtlCol="0" anchor="ctr"/>
           <a:lstStyle/>
           <a:p>
-            <a:pPr indent="0" marL="0">
+            <a:pPr marL="0" indent="0">
               <a:buNone/>
             </a:pPr>
             <a:r>
@@ -5743,7 +6947,7 @@
                   <a:srgbClr val="F8FAFC"/>
                 </a:solidFill>
               </a:rPr>
-              <a:t>功能完成度总览</a:t>
+              <a:t>项目报价梳理（新台幣）</a:t>
             </a:r>
             <a:endParaRPr lang="en-US" sz="2200" dirty="0"/>
           </a:p>
@@ -5758,7 +6962,7 @@
         <p:spPr>
           <a:xfrm>
             <a:off x="457200" y="1143000"/>
-            <a:ext cx="5029200" cy="3566160"/>
+            <a:ext cx="3931920" cy="3566160"/>
           </a:xfrm>
           <a:prstGeom prst="rect">
             <a:avLst/>
@@ -5773,13 +6977,20 @@
             <a:prstDash val="solid"/>
           </a:ln>
           <a:effectLst>
-            <a:outerShdw sx="100000" sy="100000" kx="0" ky="0" algn="bl" rotWithShape="0" blurRad="101600" dist="38100" dir="8100000">
+            <a:outerShdw blurRad="101600" dist="38100" dir="8100000" algn="bl" rotWithShape="0">
               <a:srgbClr val="000000">
                 <a:alpha val="25000"/>
               </a:srgbClr>
             </a:outerShdw>
           </a:effectLst>
         </p:spPr>
+        <p:txBody>
+          <a:bodyPr/>
+          <a:lstStyle/>
+          <a:p>
+            <a:endParaRPr lang="zh-CN" altLang="en-US"/>
+          </a:p>
+        </p:txBody>
       </p:sp>
       <p:sp>
         <p:nvSpPr>
@@ -5796,15 +7007,22 @@
             <a:avLst/>
           </a:prstGeom>
           <a:solidFill>
-            <a:srgbClr val="84CC16"/>
+            <a:srgbClr val="F97316"/>
           </a:solidFill>
           <a:ln w="12700">
             <a:solidFill>
-              <a:srgbClr val="84CC16"/>
+              <a:srgbClr val="F97316"/>
             </a:solidFill>
             <a:prstDash val="solid"/>
           </a:ln>
         </p:spPr>
+        <p:txBody>
+          <a:bodyPr/>
+          <a:lstStyle/>
+          <a:p>
+            <a:endParaRPr lang="zh-CN" altLang="en-US"/>
+          </a:p>
+        </p:txBody>
       </p:sp>
       <p:sp>
         <p:nvSpPr>
@@ -5814,8 +7032,8 @@
         </p:nvSpPr>
         <p:spPr>
           <a:xfrm>
-            <a:off x="594360" y="1207008"/>
-            <a:ext cx="4754880" cy="274320"/>
+            <a:off x="594360" y="1234440"/>
+            <a:ext cx="3749040" cy="274320"/>
           </a:xfrm>
           <a:prstGeom prst="rect">
             <a:avLst/>
@@ -5827,16 +7045,16 @@
           <a:bodyPr wrap="square" lIns="0" tIns="0" rIns="0" bIns="0" rtlCol="0" anchor="ctr"/>
           <a:lstStyle/>
           <a:p>
-            <a:pPr indent="0" marL="0">
+            <a:pPr marL="0" indent="0">
               <a:buNone/>
             </a:pPr>
             <a:r>
               <a:rPr lang="en-US" sz="1100" b="1" dirty="0">
                 <a:solidFill>
-                  <a:srgbClr val="84CC16"/>
-                </a:solidFill>
-              </a:rPr>
-              <a:t>已完成</a:t>
+                  <a:srgbClr val="F8FAFC"/>
+                </a:solidFill>
+              </a:rPr>
+              <a:t>一、人力配置</a:t>
             </a:r>
             <a:endParaRPr lang="en-US" sz="1100" dirty="0"/>
           </a:p>
@@ -5850,8 +7068,8 @@
         </p:nvSpPr>
         <p:spPr>
           <a:xfrm>
-            <a:off x="594360" y="1508760"/>
-            <a:ext cx="4754880" cy="3108960"/>
+            <a:off x="594360" y="1554480"/>
+            <a:ext cx="3749040" cy="3035808"/>
           </a:xfrm>
           <a:prstGeom prst="rect">
             <a:avLst/>
@@ -5868,179 +7086,126 @@
               <a:buChar char="•"/>
             </a:pPr>
             <a:r>
-              <a:rPr lang="en-US" sz="900" dirty="0">
-                <a:solidFill>
-                  <a:srgbClr val="94A3B8"/>
-                </a:solidFill>
-              </a:rPr>
-              <a:t>足球 / 篮球 / 板球实时比分板</a:t>
-            </a:r>
-            <a:endParaRPr lang="en-US" sz="900" dirty="0"/>
-          </a:p>
-          <a:p>
-            <a:pPr marL="342900" indent="-342900">
-              <a:buSzPct val="100000"/>
-              <a:buChar char="•"/>
-            </a:pPr>
-            <a:r>
-              <a:rPr lang="en-US" sz="900" dirty="0">
-                <a:solidFill>
-                  <a:srgbClr val="94A3B8"/>
-                </a:solidFill>
-              </a:rPr>
-              <a:t>板球深度情报（情报/叙事/概览）</a:t>
-            </a:r>
-            <a:endParaRPr lang="en-US" sz="900" dirty="0"/>
-          </a:p>
-          <a:p>
-            <a:pPr marL="342900" indent="-342900">
-              <a:buSzPct val="100000"/>
-              <a:buChar char="•"/>
-            </a:pPr>
-            <a:r>
-              <a:rPr lang="en-US" sz="900" dirty="0">
-                <a:solidFill>
-                  <a:srgbClr val="94A3B8"/>
-                </a:solidFill>
-              </a:rPr>
-              <a:t>付费内容（文章计划）</a:t>
-            </a:r>
-            <a:endParaRPr lang="en-US" sz="900" dirty="0"/>
-          </a:p>
-          <a:p>
-            <a:pPr marL="342900" indent="-342900">
-              <a:buSzPct val="100000"/>
-              <a:buChar char="•"/>
-            </a:pPr>
-            <a:r>
-              <a:rPr lang="en-US" sz="900" dirty="0">
-                <a:solidFill>
-                  <a:srgbClr val="94A3B8"/>
-                </a:solidFill>
-              </a:rPr>
-              <a:t>会员订阅体系（3 档）</a:t>
-            </a:r>
-            <a:endParaRPr lang="en-US" sz="900" dirty="0"/>
-          </a:p>
-          <a:p>
-            <a:pPr marL="342900" indent="-342900">
-              <a:buSzPct val="100000"/>
-              <a:buChar char="•"/>
-            </a:pPr>
-            <a:r>
-              <a:rPr lang="en-US" sz="900" dirty="0">
-                <a:solidFill>
-                  <a:srgbClr val="94A3B8"/>
-                </a:solidFill>
-              </a:rPr>
-              <a:t>AI 预测展示</a:t>
-            </a:r>
-            <a:endParaRPr lang="en-US" sz="900" dirty="0"/>
-          </a:p>
-          <a:p>
-            <a:pPr marL="342900" indent="-342900">
-              <a:buSzPct val="100000"/>
-              <a:buChar char="•"/>
-            </a:pPr>
-            <a:r>
-              <a:rPr lang="en-US" sz="900" dirty="0">
-                <a:solidFill>
-                  <a:srgbClr val="94A3B8"/>
-                </a:solidFill>
-              </a:rPr>
-              <a:t>管理后台（内容+用户+订单）</a:t>
-            </a:r>
-            <a:endParaRPr lang="en-US" sz="900" dirty="0"/>
-          </a:p>
-          <a:p>
-            <a:pPr marL="342900" indent="-342900">
-              <a:buSzPct val="100000"/>
-              <a:buChar char="•"/>
-            </a:pPr>
-            <a:r>
-              <a:rPr lang="en-US" sz="900" dirty="0">
-                <a:solidFill>
-                  <a:srgbClr val="94A3B8"/>
-                </a:solidFill>
-              </a:rPr>
-              <a:t>Mock 支付流程</a:t>
-            </a:r>
-            <a:endParaRPr lang="en-US" sz="900" dirty="0"/>
-          </a:p>
-          <a:p>
-            <a:pPr marL="342900" indent="-342900">
-              <a:buSzPct val="100000"/>
-              <a:buChar char="•"/>
-            </a:pPr>
-            <a:r>
-              <a:rPr lang="en-US" sz="900" dirty="0">
-                <a:solidFill>
-                  <a:srgbClr val="94A3B8"/>
-                </a:solidFill>
-              </a:rPr>
-              <a:t>多语言支持（EN/ZH-CN/ZH-TW）</a:t>
-            </a:r>
-            <a:endParaRPr lang="en-US" sz="900" dirty="0"/>
-          </a:p>
-          <a:p>
-            <a:pPr marL="342900" indent="-342900">
-              <a:buSzPct val="100000"/>
-              <a:buChar char="•"/>
-            </a:pPr>
-            <a:r>
-              <a:rPr lang="en-US" sz="900" dirty="0">
-                <a:solidFill>
-                  <a:srgbClr val="94A3B8"/>
-                </a:solidFill>
-              </a:rPr>
-              <a:t>基于角色的访问控制</a:t>
-            </a:r>
-            <a:endParaRPr lang="en-US" sz="900" dirty="0"/>
-          </a:p>
-          <a:p>
-            <a:pPr marL="342900" indent="-342900">
-              <a:buSzPct val="100000"/>
-              <a:buChar char="•"/>
-            </a:pPr>
-            <a:r>
-              <a:rPr lang="en-US" sz="900" dirty="0">
-                <a:solidFill>
-                  <a:srgbClr val="94A3B8"/>
-                </a:solidFill>
-              </a:rPr>
-              <a:t>体育数据库（积分榜/赛程/球队/H2H）</a:t>
-            </a:r>
-            <a:endParaRPr lang="en-US" sz="900" dirty="0"/>
-          </a:p>
-          <a:p>
-            <a:pPr marL="342900" indent="-342900">
-              <a:buSzPct val="100000"/>
-              <a:buChar char="•"/>
-            </a:pPr>
-            <a:r>
-              <a:rPr lang="en-US" sz="900" dirty="0">
-                <a:solidFill>
-                  <a:srgbClr val="94A3B8"/>
-                </a:solidFill>
-              </a:rPr>
-              <a:t>订单 CSV 导出 &amp; 退款管理</a:t>
-            </a:r>
-            <a:endParaRPr lang="en-US" sz="900" dirty="0"/>
-          </a:p>
-          <a:p>
-            <a:pPr marL="342900" indent="-342900">
-              <a:buSzPct val="100000"/>
-              <a:buChar char="•"/>
-            </a:pPr>
-            <a:r>
-              <a:rPr lang="en-US" sz="900" dirty="0">
-                <a:solidFill>
-                  <a:srgbClr val="94A3B8"/>
-                </a:solidFill>
-              </a:rPr>
-              <a:t>响应式深色 UI</a:t>
-            </a:r>
-            <a:endParaRPr lang="en-US" sz="900" dirty="0"/>
+              <a:rPr lang="en-US" sz="950" dirty="0">
+                <a:solidFill>
+                  <a:srgbClr val="94A3B8"/>
+                </a:solidFill>
+              </a:rPr>
+              <a:t>总投入：3–4 人</a:t>
+            </a:r>
+            <a:endParaRPr lang="en-US" sz="950" dirty="0"/>
+          </a:p>
+          <a:p>
+            <a:pPr marL="342900" indent="-342900">
+              <a:buSzPct val="100000"/>
+              <a:buChar char="•"/>
+            </a:pPr>
+            <a:r>
+              <a:rPr lang="en-US" sz="950" dirty="0">
+                <a:solidFill>
+                  <a:srgbClr val="94A3B8"/>
+                </a:solidFill>
+              </a:rPr>
+              <a:t>2 名 AI 工程师</a:t>
+            </a:r>
+            <a:endParaRPr lang="en-US" sz="950" dirty="0"/>
+          </a:p>
+          <a:p>
+            <a:pPr marL="342900" indent="-342900">
+              <a:buSzPct val="100000"/>
+              <a:buChar char="•"/>
+            </a:pPr>
+            <a:r>
+              <a:rPr lang="en-US" sz="950" dirty="0">
+                <a:solidFill>
+                  <a:srgbClr val="94A3B8"/>
+                </a:solidFill>
+              </a:rPr>
+              <a:t>1 名後端工程师</a:t>
+            </a:r>
+            <a:endParaRPr lang="en-US" sz="950" dirty="0"/>
+          </a:p>
+          <a:p>
+            <a:pPr marL="342900" indent="-342900">
+              <a:buSzPct val="100000"/>
+              <a:buChar char="•"/>
+            </a:pPr>
+            <a:r>
+              <a:rPr lang="en-US" sz="950" dirty="0">
+                <a:solidFill>
+                  <a:srgbClr val="94A3B8"/>
+                </a:solidFill>
+              </a:rPr>
+              <a:t>1 名全站工程师</a:t>
+            </a:r>
+            <a:endParaRPr lang="en-US" sz="950" dirty="0"/>
+          </a:p>
+          <a:p>
+            <a:pPr marL="342900" indent="-342900">
+              <a:buSzPct val="100000"/>
+              <a:buChar char="•"/>
+            </a:pPr>
+            <a:endParaRPr lang="en-US" sz="950" dirty="0"/>
+          </a:p>
+          <a:p>
+            <a:pPr marL="342900" indent="-342900">
+              <a:buSzPct val="100000"/>
+              <a:buChar char="•"/>
+            </a:pPr>
+            <a:r>
+              <a:rPr lang="en-US" sz="950" dirty="0">
+                <a:solidFill>
+                  <a:srgbClr val="94A3B8"/>
+                </a:solidFill>
+              </a:rPr>
+              <a:t>二、成本預估</a:t>
+            </a:r>
+            <a:endParaRPr lang="en-US" sz="950" dirty="0"/>
+          </a:p>
+          <a:p>
+            <a:pPr marL="342900" indent="-342900">
+              <a:buSzPct val="100000"/>
+              <a:buChar char="•"/>
+            </a:pPr>
+            <a:r>
+              <a:rPr lang="en-US" sz="950" dirty="0">
+                <a:solidFill>
+                  <a:srgbClr val="94A3B8"/>
+                </a:solidFill>
+              </a:rPr>
+              <a:t>算力费用：84,000–126,000 元</a:t>
+            </a:r>
+            <a:endParaRPr lang="en-US" sz="950" dirty="0"/>
+          </a:p>
+          <a:p>
+            <a:pPr marL="342900" indent="-342900">
+              <a:buSzPct val="100000"/>
+              <a:buChar char="•"/>
+            </a:pPr>
+            <a:r>
+              <a:rPr lang="en-US" sz="950" dirty="0">
+                <a:solidFill>
+                  <a:srgbClr val="94A3B8"/>
+                </a:solidFill>
+              </a:rPr>
+              <a:t>报价已包含人工成本</a:t>
+            </a:r>
+            <a:endParaRPr lang="en-US" sz="950" dirty="0"/>
+          </a:p>
+          <a:p>
+            <a:pPr marL="342900" indent="-342900">
+              <a:buSzPct val="100000"/>
+              <a:buChar char="•"/>
+            </a:pPr>
+            <a:r>
+              <a:rPr lang="en-US" sz="950" dirty="0">
+                <a:solidFill>
+                  <a:srgbClr val="94A3B8"/>
+                </a:solidFill>
+              </a:rPr>
+              <a:t>不包含每月数据相关成本</a:t>
+            </a:r>
+            <a:endParaRPr lang="en-US" sz="950" dirty="0"/>
           </a:p>
         </p:txBody>
       </p:sp>
@@ -6052,8 +7217,8 @@
         </p:nvSpPr>
         <p:spPr>
           <a:xfrm>
-            <a:off x="5760720" y="1143000"/>
-            <a:ext cx="2926080" cy="3566160"/>
+            <a:off x="4754880" y="1143000"/>
+            <a:ext cx="3931920" cy="3566160"/>
           </a:xfrm>
           <a:prstGeom prst="rect">
             <a:avLst/>
@@ -6068,13 +7233,20 @@
             <a:prstDash val="solid"/>
           </a:ln>
           <a:effectLst>
-            <a:outerShdw sx="100000" sy="100000" kx="0" ky="0" algn="bl" rotWithShape="0" blurRad="101600" dist="38100" dir="8100000">
+            <a:outerShdw blurRad="101600" dist="38100" dir="8100000" algn="bl" rotWithShape="0">
               <a:srgbClr val="000000">
                 <a:alpha val="25000"/>
               </a:srgbClr>
             </a:outerShdw>
           </a:effectLst>
         </p:spPr>
+        <p:txBody>
+          <a:bodyPr/>
+          <a:lstStyle/>
+          <a:p>
+            <a:endParaRPr lang="zh-CN" altLang="en-US"/>
+          </a:p>
+        </p:txBody>
       </p:sp>
       <p:sp>
         <p:nvSpPr>
@@ -6084,22 +7256,29 @@
         </p:nvSpPr>
         <p:spPr>
           <a:xfrm>
-            <a:off x="5760720" y="1143000"/>
+            <a:off x="4754880" y="1143000"/>
             <a:ext cx="45720" cy="3566160"/>
           </a:xfrm>
           <a:prstGeom prst="rect">
             <a:avLst/>
           </a:prstGeom>
           <a:solidFill>
-            <a:srgbClr val="F97316"/>
+            <a:srgbClr val="84CC16"/>
           </a:solidFill>
           <a:ln w="12700">
             <a:solidFill>
-              <a:srgbClr val="F97316"/>
+              <a:srgbClr val="84CC16"/>
             </a:solidFill>
             <a:prstDash val="solid"/>
           </a:ln>
         </p:spPr>
+        <p:txBody>
+          <a:bodyPr/>
+          <a:lstStyle/>
+          <a:p>
+            <a:endParaRPr lang="zh-CN" altLang="en-US"/>
+          </a:p>
+        </p:txBody>
       </p:sp>
       <p:sp>
         <p:nvSpPr>
@@ -6109,8 +7288,8 @@
         </p:nvSpPr>
         <p:spPr>
           <a:xfrm>
-            <a:off x="5897880" y="1207008"/>
-            <a:ext cx="2651760" cy="274320"/>
+            <a:off x="4892040" y="1234440"/>
+            <a:ext cx="3749040" cy="274320"/>
           </a:xfrm>
           <a:prstGeom prst="rect">
             <a:avLst/>
@@ -6122,16 +7301,16 @@
           <a:bodyPr wrap="square" lIns="0" tIns="0" rIns="0" bIns="0" rtlCol="0" anchor="ctr"/>
           <a:lstStyle/>
           <a:p>
-            <a:pPr indent="0" marL="0">
+            <a:pPr marL="0" indent="0">
               <a:buNone/>
             </a:pPr>
             <a:r>
               <a:rPr lang="en-US" sz="1100" b="1" dirty="0">
                 <a:solidFill>
-                  <a:srgbClr val="F97316"/>
-                </a:solidFill>
-              </a:rPr>
-              <a:t>待实现</a:t>
+                  <a:srgbClr val="F8FAFC"/>
+                </a:solidFill>
+              </a:rPr>
+              <a:t>三、工期安排（总计 2 週）</a:t>
             </a:r>
             <a:endParaRPr lang="en-US" sz="1100" dirty="0"/>
           </a:p>
@@ -6145,8 +7324,8 @@
         </p:nvSpPr>
         <p:spPr>
           <a:xfrm>
-            <a:off x="5897880" y="1508760"/>
-            <a:ext cx="2651760" cy="3108960"/>
+            <a:off x="4892040" y="1554480"/>
+            <a:ext cx="3749040" cy="3035808"/>
           </a:xfrm>
           <a:prstGeom prst="rect">
             <a:avLst/>
@@ -6163,59 +7342,118 @@
               <a:buChar char="•"/>
             </a:pPr>
             <a:r>
-              <a:rPr lang="en-US" sz="900" dirty="0">
-                <a:solidFill>
-                  <a:srgbClr val="94A3B8"/>
-                </a:solidFill>
-              </a:rPr>
-              <a:t>真实支付网关接入</a:t>
-            </a:r>
-            <a:endParaRPr lang="en-US" sz="900" dirty="0"/>
-          </a:p>
-          <a:p>
-            <a:pPr marL="342900" indent="-342900">
-              <a:buSzPct val="100000"/>
-              <a:buChar char="•"/>
-            </a:pPr>
-            <a:r>
-              <a:rPr lang="en-US" sz="900" dirty="0">
-                <a:solidFill>
-                  <a:srgbClr val="94A3B8"/>
-                </a:solidFill>
-              </a:rPr>
-              <a:t>自动数据同步调度</a:t>
-            </a:r>
-            <a:endParaRPr lang="en-US" sz="900" dirty="0"/>
-          </a:p>
-          <a:p>
-            <a:pPr marL="342900" indent="-342900">
-              <a:buSzPct val="100000"/>
-              <a:buChar char="•"/>
-            </a:pPr>
-            <a:r>
-              <a:rPr lang="en-US" sz="900" dirty="0">
-                <a:solidFill>
-                  <a:srgbClr val="94A3B8"/>
-                </a:solidFill>
-              </a:rPr>
-              <a:t>邮件通知</a:t>
-            </a:r>
-            <a:endParaRPr lang="en-US" sz="900" dirty="0"/>
-          </a:p>
-          <a:p>
-            <a:pPr marL="342900" indent="-342900">
-              <a:buSzPct val="100000"/>
-              <a:buChar char="•"/>
-            </a:pPr>
-            <a:r>
-              <a:rPr lang="en-US" sz="900" dirty="0">
-                <a:solidFill>
-                  <a:srgbClr val="94A3B8"/>
-                </a:solidFill>
-              </a:rPr>
-              <a:t>用户分析仪表盘</a:t>
-            </a:r>
-            <a:endParaRPr lang="en-US" sz="900" dirty="0"/>
+              <a:rPr lang="en-US" sz="950" dirty="0">
+                <a:solidFill>
+                  <a:srgbClr val="94A3B8"/>
+                </a:solidFill>
+              </a:rPr>
+              <a:t>第一週</a:t>
+            </a:r>
+            <a:endParaRPr lang="en-US" sz="950" dirty="0"/>
+          </a:p>
+          <a:p>
+            <a:pPr marL="342900" indent="-342900">
+              <a:buSzPct val="100000"/>
+              <a:buChar char="•"/>
+            </a:pPr>
+            <a:r>
+              <a:rPr lang="en-US" sz="950" dirty="0">
+                <a:solidFill>
+                  <a:srgbClr val="94A3B8"/>
+                </a:solidFill>
+              </a:rPr>
+              <a:t>  前 3 天：完成产品辞形</a:t>
+            </a:r>
+            <a:endParaRPr lang="en-US" sz="950" dirty="0"/>
+          </a:p>
+          <a:p>
+            <a:pPr marL="342900" indent="-342900">
+              <a:buSzPct val="100000"/>
+              <a:buChar char="•"/>
+            </a:pPr>
+            <a:r>
+              <a:rPr lang="en-US" sz="950" dirty="0">
+                <a:solidFill>
+                  <a:srgbClr val="94A3B8"/>
+                </a:solidFill>
+              </a:rPr>
+              <a:t>  後 3 天：接数据</a:t>
+            </a:r>
+            <a:endParaRPr lang="en-US" sz="950" dirty="0"/>
+          </a:p>
+          <a:p>
+            <a:pPr marL="342900" indent="-342900">
+              <a:buSzPct val="100000"/>
+              <a:buChar char="•"/>
+            </a:pPr>
+            <a:endParaRPr lang="en-US" sz="950" dirty="0"/>
+          </a:p>
+          <a:p>
+            <a:pPr marL="342900" indent="-342900">
+              <a:buSzPct val="100000"/>
+              <a:buChar char="•"/>
+            </a:pPr>
+            <a:r>
+              <a:rPr lang="en-US" sz="950" dirty="0">
+                <a:solidFill>
+                  <a:srgbClr val="94A3B8"/>
+                </a:solidFill>
+              </a:rPr>
+              <a:t>第二週</a:t>
+            </a:r>
+            <a:endParaRPr lang="en-US" sz="950" dirty="0"/>
+          </a:p>
+          <a:p>
+            <a:pPr marL="342900" indent="-342900">
+              <a:buSzPct val="100000"/>
+              <a:buChar char="•"/>
+            </a:pPr>
+            <a:r>
+              <a:rPr lang="en-US" sz="950" dirty="0">
+                <a:solidFill>
+                  <a:srgbClr val="94A3B8"/>
+                </a:solidFill>
+              </a:rPr>
+              <a:t>  部署与营运操作</a:t>
+            </a:r>
+            <a:endParaRPr lang="en-US" sz="950" dirty="0"/>
+          </a:p>
+          <a:p>
+            <a:pPr marL="342900" indent="-342900">
+              <a:buSzPct val="100000"/>
+              <a:buChar char="•"/>
+            </a:pPr>
+            <a:r>
+              <a:rPr lang="en-US" sz="950" dirty="0">
+                <a:solidFill>
+                  <a:srgbClr val="94A3B8"/>
+                </a:solidFill>
+              </a:rPr>
+              <a:t>  甲方派人验收与接手营运</a:t>
+            </a:r>
+            <a:endParaRPr lang="en-US" sz="950" dirty="0"/>
+          </a:p>
+          <a:p>
+            <a:pPr marL="342900" indent="-342900">
+              <a:buSzPct val="100000"/>
+              <a:buChar char="•"/>
+            </a:pPr>
+            <a:endParaRPr lang="en-US" sz="950" dirty="0"/>
+          </a:p>
+          <a:p>
+            <a:pPr marL="342900" indent="-342900">
+              <a:buSzPct val="100000"/>
+              <a:buChar char="•"/>
+            </a:pPr>
+            <a:r>
+              <a:rPr lang="en-US" sz="950" dirty="0">
+                <a:solidFill>
+                  <a:srgbClr val="94A3B8"/>
+                </a:solidFill>
+              </a:rPr>
+              <a:t>加班推进</a:t>
+            </a:r>
+            <a:endParaRPr lang="en-US" sz="950" dirty="0"/>
           </a:p>
         </p:txBody>
       </p:sp>
@@ -6229,12 +7467,13 @@
 
 <file path=ppt/slides/slide9.xml><?xml version="1.0" encoding="utf-8"?>
 <p:sld xmlns:a="http://schemas.openxmlformats.org/drawingml/2006/main" xmlns:r="http://schemas.openxmlformats.org/officeDocument/2006/relationships" xmlns:p="http://schemas.openxmlformats.org/presentationml/2006/main">
-  <p:cSld name="Slide 9">
+  <p:cSld name="Slide 8">
     <p:bg>
       <p:bgPr>
         <a:solidFill>
           <a:srgbClr val="0F172A"/>
         </a:solidFill>
+        <a:effectLst/>
       </p:bgPr>
     </p:bg>
     <p:spTree>
@@ -6259,8 +7498,8 @@
         </p:nvSpPr>
         <p:spPr>
           <a:xfrm>
-            <a:off x="0" y="0"/>
-            <a:ext cx="9144000" cy="73152"/>
+            <a:off x="457200" y="347472"/>
+            <a:ext cx="54864" cy="502920"/>
           </a:xfrm>
           <a:prstGeom prst="rect">
             <a:avLst/>
@@ -6275,42 +7514,24 @@
             <a:prstDash val="solid"/>
           </a:ln>
         </p:spPr>
-      </p:sp>
-      <p:sp>
-        <p:nvSpPr>
-          <p:cNvPr id="3" name="Shape 1"/>
-          <p:cNvSpPr/>
-          <p:nvPr/>
-        </p:nvSpPr>
-        <p:spPr>
-          <a:xfrm>
-            <a:off x="0" y="5070348"/>
-            <a:ext cx="9144000" cy="73152"/>
-          </a:xfrm>
-          <a:prstGeom prst="rect">
-            <a:avLst/>
-          </a:prstGeom>
-          <a:solidFill>
-            <a:srgbClr val="0D9488"/>
-          </a:solidFill>
-          <a:ln w="12700">
-            <a:solidFill>
-              <a:srgbClr val="0D9488"/>
-            </a:solidFill>
-            <a:prstDash val="solid"/>
-          </a:ln>
-        </p:spPr>
-      </p:sp>
-      <p:sp>
-        <p:nvSpPr>
-          <p:cNvPr id="4" name="Text 2"/>
-          <p:cNvSpPr/>
-          <p:nvPr/>
-        </p:nvSpPr>
-        <p:spPr>
-          <a:xfrm>
-            <a:off x="640080" y="1463040"/>
-            <a:ext cx="7863840" cy="731520"/>
+        <p:txBody>
+          <a:bodyPr/>
+          <a:lstStyle/>
+          <a:p>
+            <a:endParaRPr lang="zh-CN" altLang="en-US"/>
+          </a:p>
+        </p:txBody>
+      </p:sp>
+      <p:sp>
+        <p:nvSpPr>
+          <p:cNvPr id="3" name="Text 1"/>
+          <p:cNvSpPr/>
+          <p:nvPr/>
+        </p:nvSpPr>
+        <p:spPr>
+          <a:xfrm>
+            <a:off x="594360" y="320040"/>
+            <a:ext cx="7315200" cy="256032"/>
           </a:xfrm>
           <a:prstGeom prst="rect">
             <a:avLst/>
@@ -6322,31 +7543,31 @@
           <a:bodyPr wrap="square" lIns="0" tIns="0" rIns="0" bIns="0" rtlCol="0" anchor="ctr"/>
           <a:lstStyle/>
           <a:p>
-            <a:pPr algn="ctr" indent="0" marL="0">
+            <a:pPr marL="0" indent="0">
               <a:buNone/>
             </a:pPr>
             <a:r>
-              <a:rPr lang="en-US" sz="3600" b="1" dirty="0">
-                <a:solidFill>
-                  <a:srgbClr val="F8FAFC"/>
-                </a:solidFill>
-              </a:rPr>
-              <a:t>Signal Nine Sports</a:t>
-            </a:r>
-            <a:endParaRPr lang="en-US" sz="3600" dirty="0"/>
-          </a:p>
-        </p:txBody>
-      </p:sp>
-      <p:sp>
-        <p:nvSpPr>
-          <p:cNvPr id="5" name="Text 3"/>
-          <p:cNvSpPr/>
-          <p:nvPr/>
-        </p:nvSpPr>
-        <p:spPr>
-          <a:xfrm>
-            <a:off x="640080" y="2286000"/>
-            <a:ext cx="7863840" cy="457200"/>
+              <a:rPr lang="en-US" sz="900" b="1" kern="0" spc="300" dirty="0">
+                <a:solidFill>
+                  <a:srgbClr val="F97316"/>
+                </a:solidFill>
+              </a:rPr>
+              <a:t>STATUS</a:t>
+            </a:r>
+            <a:endParaRPr lang="en-US" sz="900" dirty="0"/>
+          </a:p>
+        </p:txBody>
+      </p:sp>
+      <p:sp>
+        <p:nvSpPr>
+          <p:cNvPr id="4" name="Text 2"/>
+          <p:cNvSpPr/>
+          <p:nvPr/>
+        </p:nvSpPr>
+        <p:spPr>
+          <a:xfrm>
+            <a:off x="594360" y="548640"/>
+            <a:ext cx="7772400" cy="457200"/>
           </a:xfrm>
           <a:prstGeom prst="rect">
             <a:avLst/>
@@ -6358,45 +7579,91 @@
           <a:bodyPr wrap="square" lIns="0" tIns="0" rIns="0" bIns="0" rtlCol="0" anchor="ctr"/>
           <a:lstStyle/>
           <a:p>
-            <a:pPr algn="ctr" indent="0" marL="0">
+            <a:pPr marL="0" indent="0">
               <a:buNone/>
             </a:pPr>
             <a:r>
-              <a:rPr lang="en-US" sz="1600" dirty="0">
-                <a:solidFill>
-                  <a:srgbClr val="94A3B8"/>
-                </a:solidFill>
-              </a:rPr>
-              <a:t>MVP 已就绪，核心功能全面覆盖</a:t>
-            </a:r>
-            <a:endParaRPr lang="en-US" sz="1600" dirty="0"/>
-          </a:p>
-        </p:txBody>
-      </p:sp>
-      <p:sp>
-        <p:nvSpPr>
-          <p:cNvPr id="6" name="Shape 4"/>
-          <p:cNvSpPr/>
-          <p:nvPr/>
-        </p:nvSpPr>
-        <p:spPr>
-          <a:xfrm>
-            <a:off x="3200400" y="2880360"/>
-            <a:ext cx="2743200" cy="36576"/>
+              <a:rPr lang="en-US" sz="2200" b="1" dirty="0">
+                <a:solidFill>
+                  <a:srgbClr val="F8FAFC"/>
+                </a:solidFill>
+              </a:rPr>
+              <a:t>功能完成度总览</a:t>
+            </a:r>
+            <a:endParaRPr lang="en-US" sz="2200" dirty="0"/>
+          </a:p>
+        </p:txBody>
+      </p:sp>
+      <p:sp>
+        <p:nvSpPr>
+          <p:cNvPr id="5" name="Shape 3"/>
+          <p:cNvSpPr/>
+          <p:nvPr/>
+        </p:nvSpPr>
+        <p:spPr>
+          <a:xfrm>
+            <a:off x="457200" y="1143000"/>
+            <a:ext cx="5029200" cy="3566160"/>
           </a:xfrm>
           <a:prstGeom prst="rect">
             <a:avLst/>
           </a:prstGeom>
           <a:solidFill>
-            <a:srgbClr val="334155"/>
+            <a:srgbClr val="1E293B"/>
           </a:solidFill>
-          <a:ln w="12700">
+          <a:ln w="6350">
             <a:solidFill>
               <a:srgbClr val="334155"/>
             </a:solidFill>
             <a:prstDash val="solid"/>
           </a:ln>
-        </p:spPr>
+          <a:effectLst>
+            <a:outerShdw blurRad="101600" dist="38100" dir="8100000" algn="bl" rotWithShape="0">
+              <a:srgbClr val="000000">
+                <a:alpha val="25000"/>
+              </a:srgbClr>
+            </a:outerShdw>
+          </a:effectLst>
+        </p:spPr>
+        <p:txBody>
+          <a:bodyPr/>
+          <a:lstStyle/>
+          <a:p>
+            <a:endParaRPr lang="zh-CN" altLang="en-US"/>
+          </a:p>
+        </p:txBody>
+      </p:sp>
+      <p:sp>
+        <p:nvSpPr>
+          <p:cNvPr id="6" name="Shape 4"/>
+          <p:cNvSpPr/>
+          <p:nvPr/>
+        </p:nvSpPr>
+        <p:spPr>
+          <a:xfrm>
+            <a:off x="457200" y="1143000"/>
+            <a:ext cx="45720" cy="3566160"/>
+          </a:xfrm>
+          <a:prstGeom prst="rect">
+            <a:avLst/>
+          </a:prstGeom>
+          <a:solidFill>
+            <a:srgbClr val="84CC16"/>
+          </a:solidFill>
+          <a:ln w="12700">
+            <a:solidFill>
+              <a:srgbClr val="84CC16"/>
+            </a:solidFill>
+            <a:prstDash val="solid"/>
+          </a:ln>
+        </p:spPr>
+        <p:txBody>
+          <a:bodyPr/>
+          <a:lstStyle/>
+          <a:p>
+            <a:endParaRPr lang="zh-CN" altLang="en-US"/>
+          </a:p>
+        </p:txBody>
       </p:sp>
       <p:sp>
         <p:nvSpPr>
@@ -6406,8 +7673,8 @@
         </p:nvSpPr>
         <p:spPr>
           <a:xfrm>
-            <a:off x="640080" y="3017520"/>
-            <a:ext cx="7863840" cy="365760"/>
+            <a:off x="594360" y="1207008"/>
+            <a:ext cx="4754880" cy="274320"/>
           </a:xfrm>
           <a:prstGeom prst="rect">
             <a:avLst/>
@@ -6419,18 +7686,409 @@
           <a:bodyPr wrap="square" lIns="0" tIns="0" rIns="0" bIns="0" rtlCol="0" anchor="ctr"/>
           <a:lstStyle/>
           <a:p>
-            <a:pPr algn="ctr" indent="0" marL="0">
+            <a:pPr marL="0" indent="0">
               <a:buNone/>
             </a:pPr>
             <a:r>
-              <a:rPr lang="en-US" sz="1300" dirty="0">
+              <a:rPr lang="en-US" sz="1100" b="1" dirty="0">
+                <a:solidFill>
+                  <a:srgbClr val="84CC16"/>
+                </a:solidFill>
+              </a:rPr>
+              <a:t>已完成</a:t>
+            </a:r>
+            <a:endParaRPr lang="en-US" sz="1100" dirty="0"/>
+          </a:p>
+        </p:txBody>
+      </p:sp>
+      <p:sp>
+        <p:nvSpPr>
+          <p:cNvPr id="8" name="Text 6"/>
+          <p:cNvSpPr/>
+          <p:nvPr/>
+        </p:nvSpPr>
+        <p:spPr>
+          <a:xfrm>
+            <a:off x="594360" y="1508760"/>
+            <a:ext cx="4754880" cy="3108960"/>
+          </a:xfrm>
+          <a:prstGeom prst="rect">
+            <a:avLst/>
+          </a:prstGeom>
+          <a:noFill/>
+          <a:ln/>
+        </p:spPr>
+        <p:txBody>
+          <a:bodyPr wrap="square" lIns="0" tIns="0" rIns="0" bIns="0" rtlCol="0" anchor="ctr"/>
+          <a:lstStyle/>
+          <a:p>
+            <a:pPr marL="342900" indent="-342900">
+              <a:buSzPct val="100000"/>
+              <a:buChar char="•"/>
+            </a:pPr>
+            <a:r>
+              <a:rPr lang="en-US" sz="900" dirty="0">
+                <a:solidFill>
+                  <a:srgbClr val="94A3B8"/>
+                </a:solidFill>
+              </a:rPr>
+              <a:t>足球 / 篮球 / 板球实时比分板</a:t>
+            </a:r>
+            <a:endParaRPr lang="en-US" sz="900" dirty="0"/>
+          </a:p>
+          <a:p>
+            <a:pPr marL="342900" indent="-342900">
+              <a:buSzPct val="100000"/>
+              <a:buChar char="•"/>
+            </a:pPr>
+            <a:r>
+              <a:rPr lang="en-US" sz="900" dirty="0">
+                <a:solidFill>
+                  <a:srgbClr val="94A3B8"/>
+                </a:solidFill>
+              </a:rPr>
+              <a:t>板球深度情报（情报/叙事/概览）</a:t>
+            </a:r>
+            <a:endParaRPr lang="en-US" sz="900" dirty="0"/>
+          </a:p>
+          <a:p>
+            <a:pPr marL="342900" indent="-342900">
+              <a:buSzPct val="100000"/>
+              <a:buChar char="•"/>
+            </a:pPr>
+            <a:r>
+              <a:rPr lang="en-US" sz="900" dirty="0">
+                <a:solidFill>
+                  <a:srgbClr val="94A3B8"/>
+                </a:solidFill>
+              </a:rPr>
+              <a:t>付费内容（文章计划）</a:t>
+            </a:r>
+            <a:endParaRPr lang="en-US" sz="900" dirty="0"/>
+          </a:p>
+          <a:p>
+            <a:pPr marL="342900" indent="-342900">
+              <a:buSzPct val="100000"/>
+              <a:buChar char="•"/>
+            </a:pPr>
+            <a:r>
+              <a:rPr lang="en-US" sz="900" dirty="0">
+                <a:solidFill>
+                  <a:srgbClr val="94A3B8"/>
+                </a:solidFill>
+              </a:rPr>
+              <a:t>会员订阅体系（3 档）</a:t>
+            </a:r>
+            <a:endParaRPr lang="en-US" sz="900" dirty="0"/>
+          </a:p>
+          <a:p>
+            <a:pPr marL="342900" indent="-342900">
+              <a:buSzPct val="100000"/>
+              <a:buChar char="•"/>
+            </a:pPr>
+            <a:r>
+              <a:rPr lang="en-US" sz="900" dirty="0">
+                <a:solidFill>
+                  <a:srgbClr val="94A3B8"/>
+                </a:solidFill>
+              </a:rPr>
+              <a:t>AI 预测展示</a:t>
+            </a:r>
+            <a:endParaRPr lang="en-US" sz="900" dirty="0"/>
+          </a:p>
+          <a:p>
+            <a:pPr marL="342900" indent="-342900">
+              <a:buSzPct val="100000"/>
+              <a:buChar char="•"/>
+            </a:pPr>
+            <a:r>
+              <a:rPr lang="en-US" sz="900" dirty="0">
+                <a:solidFill>
+                  <a:srgbClr val="94A3B8"/>
+                </a:solidFill>
+              </a:rPr>
+              <a:t>管理后台（内容+用户+订单）</a:t>
+            </a:r>
+            <a:endParaRPr lang="en-US" sz="900" dirty="0"/>
+          </a:p>
+          <a:p>
+            <a:pPr marL="342900" indent="-342900">
+              <a:buSzPct val="100000"/>
+              <a:buChar char="•"/>
+            </a:pPr>
+            <a:r>
+              <a:rPr lang="en-US" sz="900" dirty="0">
+                <a:solidFill>
+                  <a:srgbClr val="94A3B8"/>
+                </a:solidFill>
+              </a:rPr>
+              <a:t>Mock 支付流程</a:t>
+            </a:r>
+            <a:endParaRPr lang="en-US" sz="900" dirty="0"/>
+          </a:p>
+          <a:p>
+            <a:pPr marL="342900" indent="-342900">
+              <a:buSzPct val="100000"/>
+              <a:buChar char="•"/>
+            </a:pPr>
+            <a:r>
+              <a:rPr lang="en-US" sz="900" dirty="0">
+                <a:solidFill>
+                  <a:srgbClr val="94A3B8"/>
+                </a:solidFill>
+              </a:rPr>
+              <a:t>多语言支持（EN/ZH-CN/ZH-TW）</a:t>
+            </a:r>
+            <a:endParaRPr lang="en-US" sz="900" dirty="0"/>
+          </a:p>
+          <a:p>
+            <a:pPr marL="342900" indent="-342900">
+              <a:buSzPct val="100000"/>
+              <a:buChar char="•"/>
+            </a:pPr>
+            <a:r>
+              <a:rPr lang="en-US" sz="900" dirty="0">
+                <a:solidFill>
+                  <a:srgbClr val="94A3B8"/>
+                </a:solidFill>
+              </a:rPr>
+              <a:t>基于角色的访问控制</a:t>
+            </a:r>
+            <a:endParaRPr lang="en-US" sz="900" dirty="0"/>
+          </a:p>
+          <a:p>
+            <a:pPr marL="342900" indent="-342900">
+              <a:buSzPct val="100000"/>
+              <a:buChar char="•"/>
+            </a:pPr>
+            <a:r>
+              <a:rPr lang="en-US" sz="900" dirty="0">
+                <a:solidFill>
+                  <a:srgbClr val="94A3B8"/>
+                </a:solidFill>
+              </a:rPr>
+              <a:t>体育数据库（积分榜/赛程/球队/H2H）</a:t>
+            </a:r>
+            <a:endParaRPr lang="en-US" sz="900" dirty="0"/>
+          </a:p>
+          <a:p>
+            <a:pPr marL="342900" indent="-342900">
+              <a:buSzPct val="100000"/>
+              <a:buChar char="•"/>
+            </a:pPr>
+            <a:r>
+              <a:rPr lang="en-US" sz="900" dirty="0">
+                <a:solidFill>
+                  <a:srgbClr val="94A3B8"/>
+                </a:solidFill>
+              </a:rPr>
+              <a:t>订单 CSV 导出 &amp; 退款管理</a:t>
+            </a:r>
+            <a:endParaRPr lang="en-US" sz="900" dirty="0"/>
+          </a:p>
+          <a:p>
+            <a:pPr marL="342900" indent="-342900">
+              <a:buSzPct val="100000"/>
+              <a:buChar char="•"/>
+            </a:pPr>
+            <a:r>
+              <a:rPr lang="en-US" sz="900" dirty="0">
+                <a:solidFill>
+                  <a:srgbClr val="94A3B8"/>
+                </a:solidFill>
+              </a:rPr>
+              <a:t>响应式深色 UI</a:t>
+            </a:r>
+            <a:endParaRPr lang="en-US" sz="900" dirty="0"/>
+          </a:p>
+        </p:txBody>
+      </p:sp>
+      <p:sp>
+        <p:nvSpPr>
+          <p:cNvPr id="9" name="Shape 7"/>
+          <p:cNvSpPr/>
+          <p:nvPr/>
+        </p:nvSpPr>
+        <p:spPr>
+          <a:xfrm>
+            <a:off x="5760720" y="1143000"/>
+            <a:ext cx="2926080" cy="3566160"/>
+          </a:xfrm>
+          <a:prstGeom prst="rect">
+            <a:avLst/>
+          </a:prstGeom>
+          <a:solidFill>
+            <a:srgbClr val="1E293B"/>
+          </a:solidFill>
+          <a:ln w="6350">
+            <a:solidFill>
+              <a:srgbClr val="334155"/>
+            </a:solidFill>
+            <a:prstDash val="solid"/>
+          </a:ln>
+          <a:effectLst>
+            <a:outerShdw blurRad="101600" dist="38100" dir="8100000" algn="bl" rotWithShape="0">
+              <a:srgbClr val="000000">
+                <a:alpha val="25000"/>
+              </a:srgbClr>
+            </a:outerShdw>
+          </a:effectLst>
+        </p:spPr>
+        <p:txBody>
+          <a:bodyPr/>
+          <a:lstStyle/>
+          <a:p>
+            <a:endParaRPr lang="zh-CN" altLang="en-US"/>
+          </a:p>
+        </p:txBody>
+      </p:sp>
+      <p:sp>
+        <p:nvSpPr>
+          <p:cNvPr id="10" name="Shape 8"/>
+          <p:cNvSpPr/>
+          <p:nvPr/>
+        </p:nvSpPr>
+        <p:spPr>
+          <a:xfrm>
+            <a:off x="5760720" y="1143000"/>
+            <a:ext cx="45720" cy="3566160"/>
+          </a:xfrm>
+          <a:prstGeom prst="rect">
+            <a:avLst/>
+          </a:prstGeom>
+          <a:solidFill>
+            <a:srgbClr val="F97316"/>
+          </a:solidFill>
+          <a:ln w="12700">
+            <a:solidFill>
+              <a:srgbClr val="F97316"/>
+            </a:solidFill>
+            <a:prstDash val="solid"/>
+          </a:ln>
+        </p:spPr>
+        <p:txBody>
+          <a:bodyPr/>
+          <a:lstStyle/>
+          <a:p>
+            <a:endParaRPr lang="zh-CN" altLang="en-US"/>
+          </a:p>
+        </p:txBody>
+      </p:sp>
+      <p:sp>
+        <p:nvSpPr>
+          <p:cNvPr id="11" name="Text 9"/>
+          <p:cNvSpPr/>
+          <p:nvPr/>
+        </p:nvSpPr>
+        <p:spPr>
+          <a:xfrm>
+            <a:off x="5897880" y="1207008"/>
+            <a:ext cx="2651760" cy="274320"/>
+          </a:xfrm>
+          <a:prstGeom prst="rect">
+            <a:avLst/>
+          </a:prstGeom>
+          <a:noFill/>
+          <a:ln/>
+        </p:spPr>
+        <p:txBody>
+          <a:bodyPr wrap="square" lIns="0" tIns="0" rIns="0" bIns="0" rtlCol="0" anchor="ctr"/>
+          <a:lstStyle/>
+          <a:p>
+            <a:pPr marL="0" indent="0">
+              <a:buNone/>
+            </a:pPr>
+            <a:r>
+              <a:rPr lang="en-US" sz="1100" b="1" dirty="0">
                 <a:solidFill>
                   <a:srgbClr val="F97316"/>
                 </a:solidFill>
               </a:rPr>
-              <a:t>感谢您的关注</a:t>
-            </a:r>
-            <a:endParaRPr lang="en-US" sz="1300" dirty="0"/>
+              <a:t>待实现</a:t>
+            </a:r>
+            <a:endParaRPr lang="en-US" sz="1100" dirty="0"/>
+          </a:p>
+        </p:txBody>
+      </p:sp>
+      <p:sp>
+        <p:nvSpPr>
+          <p:cNvPr id="12" name="Text 10"/>
+          <p:cNvSpPr/>
+          <p:nvPr/>
+        </p:nvSpPr>
+        <p:spPr>
+          <a:xfrm>
+            <a:off x="5897880" y="1508760"/>
+            <a:ext cx="2651760" cy="3108960"/>
+          </a:xfrm>
+          <a:prstGeom prst="rect">
+            <a:avLst/>
+          </a:prstGeom>
+          <a:noFill/>
+          <a:ln/>
+        </p:spPr>
+        <p:txBody>
+          <a:bodyPr wrap="square" lIns="0" tIns="0" rIns="0" bIns="0" rtlCol="0" anchor="ctr"/>
+          <a:lstStyle/>
+          <a:p>
+            <a:pPr marL="342900" indent="-342900">
+              <a:buSzPct val="100000"/>
+              <a:buChar char="•"/>
+            </a:pPr>
+            <a:r>
+              <a:rPr lang="en-US" sz="900" dirty="0">
+                <a:solidFill>
+                  <a:srgbClr val="94A3B8"/>
+                </a:solidFill>
+              </a:rPr>
+              <a:t>真实支付网关接入</a:t>
+            </a:r>
+            <a:endParaRPr lang="en-US" sz="900" dirty="0"/>
+          </a:p>
+          <a:p>
+            <a:pPr marL="342900" indent="-342900">
+              <a:buSzPct val="100000"/>
+              <a:buChar char="•"/>
+            </a:pPr>
+            <a:r>
+              <a:rPr lang="en-US" sz="900" dirty="0">
+                <a:solidFill>
+                  <a:srgbClr val="94A3B8"/>
+                </a:solidFill>
+              </a:rPr>
+              <a:t>自动数据同步调度</a:t>
+            </a:r>
+            <a:endParaRPr lang="en-US" sz="900" dirty="0"/>
+          </a:p>
+          <a:p>
+            <a:pPr marL="342900" indent="-342900">
+              <a:buSzPct val="100000"/>
+              <a:buChar char="•"/>
+            </a:pPr>
+            <a:r>
+              <a:rPr lang="en-US" sz="900" dirty="0">
+                <a:solidFill>
+                  <a:srgbClr val="94A3B8"/>
+                </a:solidFill>
+              </a:rPr>
+              <a:t>邮件通知</a:t>
+            </a:r>
+            <a:endParaRPr lang="en-US" sz="900" dirty="0"/>
+          </a:p>
+          <a:p>
+            <a:pPr marL="342900" indent="-342900">
+              <a:buSzPct val="100000"/>
+              <a:buChar char="•"/>
+            </a:pPr>
+            <a:r>
+              <a:rPr lang="en-US" sz="900" dirty="0">
+                <a:solidFill>
+                  <a:srgbClr val="94A3B8"/>
+                </a:solidFill>
+              </a:rPr>
+              <a:t>用户分析仪表盘</a:t>
+            </a:r>
+            <a:endParaRPr lang="en-US" sz="900" dirty="0"/>
           </a:p>
         </p:txBody>
       </p:sp>
@@ -6735,4 +8393,319 @@
     </a:ext>
   </a:extLst>
 </a:theme>
+</file>
+
+<file path=ppt/theme/theme2.xml><?xml version="1.0" encoding="utf-8"?>
+<a:theme xmlns:a="http://schemas.openxmlformats.org/drawingml/2006/main" name="Office 主题​​">
+  <a:themeElements>
+    <a:clrScheme name="Office">
+      <a:dk1>
+        <a:sysClr val="windowText" lastClr="000000"/>
+      </a:dk1>
+      <a:lt1>
+        <a:sysClr val="window" lastClr="FFFFFF"/>
+      </a:lt1>
+      <a:dk2>
+        <a:srgbClr val="0E2841"/>
+      </a:dk2>
+      <a:lt2>
+        <a:srgbClr val="E8E8E8"/>
+      </a:lt2>
+      <a:accent1>
+        <a:srgbClr val="156082"/>
+      </a:accent1>
+      <a:accent2>
+        <a:srgbClr val="E97132"/>
+      </a:accent2>
+      <a:accent3>
+        <a:srgbClr val="196B24"/>
+      </a:accent3>
+      <a:accent4>
+        <a:srgbClr val="0F9ED5"/>
+      </a:accent4>
+      <a:accent5>
+        <a:srgbClr val="A02B93"/>
+      </a:accent5>
+      <a:accent6>
+        <a:srgbClr val="4EA72E"/>
+      </a:accent6>
+      <a:hlink>
+        <a:srgbClr val="467886"/>
+      </a:hlink>
+      <a:folHlink>
+        <a:srgbClr val="96607D"/>
+      </a:folHlink>
+    </a:clrScheme>
+    <a:fontScheme name="Office">
+      <a:majorFont>
+        <a:latin typeface="等线 Light" panose="02110004020202020204"/>
+        <a:ea typeface=""/>
+        <a:cs typeface=""/>
+        <a:font script="Jpan" typeface="游ゴシック Light"/>
+        <a:font script="Hang" typeface="맑은 고딕"/>
+        <a:font script="Hans" typeface="等线 Light"/>
+        <a:font script="Hant" typeface="新細明體"/>
+        <a:font script="Arab" typeface="Times New Roman"/>
+        <a:font script="Hebr" typeface="Times New Roman"/>
+        <a:font script="Thai" typeface="Angsana New"/>
+        <a:font script="Ethi" typeface="Nyala"/>
+        <a:font script="Beng" typeface="Vrinda"/>
+        <a:font script="Gujr" typeface="Shruti"/>
+        <a:font script="Khmr" typeface="MoolBoran"/>
+        <a:font script="Knda" typeface="Tunga"/>
+        <a:font script="Guru" typeface="Raavi"/>
+        <a:font script="Cans" typeface="Euphemia"/>
+        <a:font script="Cher" typeface="Plantagenet Cherokee"/>
+        <a:font script="Yiii" typeface="Microsoft Yi Baiti"/>
+        <a:font script="Tibt" typeface="Microsoft Himalaya"/>
+        <a:font script="Thaa" typeface="MV Boli"/>
+        <a:font script="Deva" typeface="Mangal"/>
+        <a:font script="Telu" typeface="Gautami"/>
+        <a:font script="Taml" typeface="Latha"/>
+        <a:font script="Syrc" typeface="Estrangelo Edessa"/>
+        <a:font script="Orya" typeface="Kalinga"/>
+        <a:font script="Mlym" typeface="Kartika"/>
+        <a:font script="Laoo" typeface="DokChampa"/>
+        <a:font script="Sinh" typeface="Iskoola Pota"/>
+        <a:font script="Mong" typeface="Mongolian Baiti"/>
+        <a:font script="Viet" typeface="Times New Roman"/>
+        <a:font script="Uigh" typeface="Microsoft Uighur"/>
+        <a:font script="Geor" typeface="Sylfaen"/>
+        <a:font script="Armn" typeface="Arial"/>
+        <a:font script="Bugi" typeface="Leelawadee UI"/>
+        <a:font script="Bopo" typeface="Microsoft JhengHei"/>
+        <a:font script="Java" typeface="Javanese Text"/>
+        <a:font script="Lisu" typeface="Segoe UI"/>
+        <a:font script="Mymr" typeface="Myanmar Text"/>
+        <a:font script="Nkoo" typeface="Ebrima"/>
+        <a:font script="Olck" typeface="Nirmala UI"/>
+        <a:font script="Osma" typeface="Ebrima"/>
+        <a:font script="Phag" typeface="Phagspa"/>
+        <a:font script="Syrn" typeface="Estrangelo Edessa"/>
+        <a:font script="Syrj" typeface="Estrangelo Edessa"/>
+        <a:font script="Syre" typeface="Estrangelo Edessa"/>
+        <a:font script="Sora" typeface="Nirmala UI"/>
+        <a:font script="Tale" typeface="Microsoft Tai Le"/>
+        <a:font script="Talu" typeface="Microsoft New Tai Lue"/>
+        <a:font script="Tfng" typeface="Ebrima"/>
+      </a:majorFont>
+      <a:minorFont>
+        <a:latin typeface="等线" panose="02110004020202020204"/>
+        <a:ea typeface=""/>
+        <a:cs typeface=""/>
+        <a:font script="Jpan" typeface="游ゴシック"/>
+        <a:font script="Hang" typeface="맑은 고딕"/>
+        <a:font script="Hans" typeface="等线"/>
+        <a:font script="Hant" typeface="新細明體"/>
+        <a:font script="Arab" typeface="Arial"/>
+        <a:font script="Hebr" typeface="Arial"/>
+        <a:font script="Thai" typeface="Cordia New"/>
+        <a:font script="Ethi" typeface="Nyala"/>
+        <a:font script="Beng" typeface="Vrinda"/>
+        <a:font script="Gujr" typeface="Shruti"/>
+        <a:font script="Khmr" typeface="DaunPenh"/>
+        <a:font script="Knda" typeface="Tunga"/>
+        <a:font script="Guru" typeface="Raavi"/>
+        <a:font script="Cans" typeface="Euphemia"/>
+        <a:font script="Cher" typeface="Plantagenet Cherokee"/>
+        <a:font script="Yiii" typeface="Microsoft Yi Baiti"/>
+        <a:font script="Tibt" typeface="Microsoft Himalaya"/>
+        <a:font script="Thaa" typeface="MV Boli"/>
+        <a:font script="Deva" typeface="Mangal"/>
+        <a:font script="Telu" typeface="Gautami"/>
+        <a:font script="Taml" typeface="Latha"/>
+        <a:font script="Syrc" typeface="Estrangelo Edessa"/>
+        <a:font script="Orya" typeface="Kalinga"/>
+        <a:font script="Mlym" typeface="Kartika"/>
+        <a:font script="Laoo" typeface="DokChampa"/>
+        <a:font script="Sinh" typeface="Iskoola Pota"/>
+        <a:font script="Mong" typeface="Mongolian Baiti"/>
+        <a:font script="Viet" typeface="Arial"/>
+        <a:font script="Uigh" typeface="Microsoft Uighur"/>
+        <a:font script="Geor" typeface="Sylfaen"/>
+        <a:font script="Armn" typeface="Arial"/>
+        <a:font script="Bugi" typeface="Leelawadee UI"/>
+        <a:font script="Bopo" typeface="Microsoft JhengHei"/>
+        <a:font script="Java" typeface="Javanese Text"/>
+        <a:font script="Lisu" typeface="Segoe UI"/>
+        <a:font script="Mymr" typeface="Myanmar Text"/>
+        <a:font script="Nkoo" typeface="Ebrima"/>
+        <a:font script="Olck" typeface="Nirmala UI"/>
+        <a:font script="Osma" typeface="Ebrima"/>
+        <a:font script="Phag" typeface="Phagspa"/>
+        <a:font script="Syrn" typeface="Estrangelo Edessa"/>
+        <a:font script="Syrj" typeface="Estrangelo Edessa"/>
+        <a:font script="Syre" typeface="Estrangelo Edessa"/>
+        <a:font script="Sora" typeface="Nirmala UI"/>
+        <a:font script="Tale" typeface="Microsoft Tai Le"/>
+        <a:font script="Talu" typeface="Microsoft New Tai Lue"/>
+        <a:font script="Tfng" typeface="Ebrima"/>
+      </a:minorFont>
+    </a:fontScheme>
+    <a:fmtScheme name="Office">
+      <a:fillStyleLst>
+        <a:solidFill>
+          <a:schemeClr val="phClr"/>
+        </a:solidFill>
+        <a:gradFill rotWithShape="1">
+          <a:gsLst>
+            <a:gs pos="0">
+              <a:schemeClr val="phClr">
+                <a:lumMod val="110000"/>
+                <a:satMod val="105000"/>
+                <a:tint val="67000"/>
+              </a:schemeClr>
+            </a:gs>
+            <a:gs pos="50000">
+              <a:schemeClr val="phClr">
+                <a:lumMod val="105000"/>
+                <a:satMod val="103000"/>
+                <a:tint val="73000"/>
+              </a:schemeClr>
+            </a:gs>
+            <a:gs pos="100000">
+              <a:schemeClr val="phClr">
+                <a:lumMod val="105000"/>
+                <a:satMod val="109000"/>
+                <a:tint val="81000"/>
+              </a:schemeClr>
+            </a:gs>
+          </a:gsLst>
+          <a:lin ang="5400000" scaled="0"/>
+        </a:gradFill>
+        <a:gradFill rotWithShape="1">
+          <a:gsLst>
+            <a:gs pos="0">
+              <a:schemeClr val="phClr">
+                <a:satMod val="103000"/>
+                <a:lumMod val="102000"/>
+                <a:tint val="94000"/>
+              </a:schemeClr>
+            </a:gs>
+            <a:gs pos="50000">
+              <a:schemeClr val="phClr">
+                <a:satMod val="110000"/>
+                <a:lumMod val="100000"/>
+                <a:shade val="100000"/>
+              </a:schemeClr>
+            </a:gs>
+            <a:gs pos="100000">
+              <a:schemeClr val="phClr">
+                <a:lumMod val="99000"/>
+                <a:satMod val="120000"/>
+                <a:shade val="78000"/>
+              </a:schemeClr>
+            </a:gs>
+          </a:gsLst>
+          <a:lin ang="5400000" scaled="0"/>
+        </a:gradFill>
+      </a:fillStyleLst>
+      <a:lnStyleLst>
+        <a:ln w="12700" cap="flat" cmpd="sng" algn="ctr">
+          <a:solidFill>
+            <a:schemeClr val="phClr"/>
+          </a:solidFill>
+          <a:prstDash val="solid"/>
+          <a:miter lim="800000"/>
+        </a:ln>
+        <a:ln w="19050" cap="flat" cmpd="sng" algn="ctr">
+          <a:solidFill>
+            <a:schemeClr val="phClr"/>
+          </a:solidFill>
+          <a:prstDash val="solid"/>
+          <a:miter lim="800000"/>
+        </a:ln>
+        <a:ln w="25400" cap="flat" cmpd="sng" algn="ctr">
+          <a:solidFill>
+            <a:schemeClr val="phClr"/>
+          </a:solidFill>
+          <a:prstDash val="solid"/>
+          <a:miter lim="800000"/>
+        </a:ln>
+      </a:lnStyleLst>
+      <a:effectStyleLst>
+        <a:effectStyle>
+          <a:effectLst/>
+        </a:effectStyle>
+        <a:effectStyle>
+          <a:effectLst/>
+        </a:effectStyle>
+        <a:effectStyle>
+          <a:effectLst>
+            <a:outerShdw blurRad="57150" dist="19050" dir="5400000" algn="ctr" rotWithShape="0">
+              <a:srgbClr val="000000">
+                <a:alpha val="63000"/>
+              </a:srgbClr>
+            </a:outerShdw>
+          </a:effectLst>
+        </a:effectStyle>
+      </a:effectStyleLst>
+      <a:bgFillStyleLst>
+        <a:solidFill>
+          <a:schemeClr val="phClr"/>
+        </a:solidFill>
+        <a:solidFill>
+          <a:schemeClr val="phClr">
+            <a:tint val="95000"/>
+            <a:satMod val="170000"/>
+          </a:schemeClr>
+        </a:solidFill>
+        <a:gradFill rotWithShape="1">
+          <a:gsLst>
+            <a:gs pos="0">
+              <a:schemeClr val="phClr">
+                <a:tint val="93000"/>
+                <a:satMod val="150000"/>
+                <a:shade val="98000"/>
+                <a:lumMod val="102000"/>
+              </a:schemeClr>
+            </a:gs>
+            <a:gs pos="50000">
+              <a:schemeClr val="phClr">
+                <a:tint val="98000"/>
+                <a:satMod val="130000"/>
+                <a:shade val="90000"/>
+                <a:lumMod val="103000"/>
+              </a:schemeClr>
+            </a:gs>
+            <a:gs pos="100000">
+              <a:schemeClr val="phClr">
+                <a:shade val="63000"/>
+                <a:satMod val="120000"/>
+              </a:schemeClr>
+            </a:gs>
+          </a:gsLst>
+          <a:lin ang="5400000" scaled="0"/>
+        </a:gradFill>
+      </a:bgFillStyleLst>
+    </a:fmtScheme>
+  </a:themeElements>
+  <a:objectDefaults>
+    <a:lnDef>
+      <a:spPr/>
+      <a:bodyPr/>
+      <a:lstStyle/>
+      <a:style>
+        <a:lnRef idx="2">
+          <a:schemeClr val="accent1"/>
+        </a:lnRef>
+        <a:fillRef idx="0">
+          <a:schemeClr val="accent1"/>
+        </a:fillRef>
+        <a:effectRef idx="1">
+          <a:schemeClr val="accent1"/>
+        </a:effectRef>
+        <a:fontRef idx="minor">
+          <a:schemeClr val="tx1"/>
+        </a:fontRef>
+      </a:style>
+    </a:lnDef>
+  </a:objectDefaults>
+  <a:extraClrSchemeLst/>
+  <a:extLst>
+    <a:ext uri="{05A4C25C-085E-4340-85A3-A5531E510DB2}">
+      <thm15:themeFamily xmlns:thm15="http://schemas.microsoft.com/office/thememl/2012/main" name="Office Theme" id="{2E142A2C-CD16-42D6-873A-C26D2A0506FA}" vid="{1BDDFF52-6CD6-40A5-AB3C-68EB2F1E4D0A}"/>
+    </a:ext>
+  </a:extLst>
+</a:theme>
 </file>